--- a/NurseFlow_Project_Presentation.pptx
+++ b/NurseFlow_Project_Presentation.pptx
@@ -15,6 +15,8 @@
     <p:sldId id="263" r:id="rId14"/>
     <p:sldId id="264" r:id="rId15"/>
     <p:sldId id="265" r:id="rId16"/>
+    <p:sldId id="266" r:id="rId17"/>
+    <p:sldId id="267" r:id="rId18"/>
   </p:sldIdLst>
   <p:sldSz cx="12191695" cy="6858000" type="screen4x3"/>
   <p:notesSz cx="6858000" cy="9144000"/>
@@ -3114,7 +3116,7 @@
         <p:spPr>
           <a:xfrm>
             <a:off x="0" y="0"/>
-            <a:ext cx="274320" cy="6858000"/>
+            <a:ext cx="365760" cy="6858000"/>
           </a:xfrm>
           <a:prstGeom prst="rect">
             <a:avLst/>
@@ -3123,9 +3125,7 @@
             <a:srgbClr val="5142C5"/>
           </a:solidFill>
           <a:ln>
-            <a:solidFill>
-              <a:srgbClr val="5142C5"/>
-            </a:solidFill>
+            <a:noFill/>
           </a:ln>
         </p:spPr>
         <p:style>
@@ -3152,35 +3152,54 @@
       </p:sp>
       <p:sp>
         <p:nvSpPr>
-          <p:cNvPr id="3" name="TextBox 2"/>
-          <p:cNvSpPr txBox="1"/>
+          <p:cNvPr id="3" name="Rounded Rectangle 2"/>
+          <p:cNvSpPr/>
           <p:nvPr/>
         </p:nvSpPr>
         <p:spPr>
           <a:xfrm>
-            <a:off x="1097280" y="1828800"/>
-            <a:ext cx="10058400" cy="2743200"/>
-          </a:xfrm>
-          <a:prstGeom prst="rect">
-            <a:avLst/>
-          </a:prstGeom>
-          <a:noFill/>
-        </p:spPr>
-        <p:txBody>
-          <a:bodyPr wrap="none">
-            <a:spAutoFit/>
-          </a:bodyPr>
-          <a:lstStyle/>
-          <a:p>
-            <a:pPr>
-              <a:defRPr sz="5400" b="1">
+            <a:off x="1097280" y="1097280"/>
+            <a:ext cx="10058400" cy="4572000"/>
+          </a:xfrm>
+          <a:prstGeom prst="roundRect">
+            <a:avLst/>
+          </a:prstGeom>
+          <a:solidFill>
+            <a:srgbClr val="1E1E37"/>
+          </a:solidFill>
+          <a:ln w="25400">
+            <a:solidFill>
+              <a:srgbClr val="5142C5"/>
+            </a:solidFill>
+          </a:ln>
+        </p:spPr>
+        <p:style>
+          <a:lnRef idx="1">
+            <a:schemeClr val="accent1"/>
+          </a:lnRef>
+          <a:fillRef idx="3">
+            <a:schemeClr val="accent1"/>
+          </a:fillRef>
+          <a:effectRef idx="2">
+            <a:schemeClr val="accent1"/>
+          </a:effectRef>
+          <a:fontRef idx="minor">
+            <a:schemeClr val="lt1"/>
+          </a:fontRef>
+        </p:style>
+        <p:txBody>
+          <a:bodyPr rtlCol="0" anchor="ctr" wrap="square" lIns="457200" tIns="457200"/>
+          <a:lstStyle/>
+          <a:p>
+            <a:pPr algn="ctr">
+              <a:defRPr sz="4400" b="1">
                 <a:solidFill>
                   <a:srgbClr val="FFFFFF"/>
                 </a:solidFill>
               </a:defRPr>
             </a:pPr>
             <a:r>
-              <a:t>NURSEFLOW</a:t>
+              <a:t>🏥 NURSEFLOW</a:t>
             </a:r>
           </a:p>
           <a:p>
@@ -3188,20 +3207,20 @@
               <a:spcBef>
                 <a:spcPts val="1000"/>
               </a:spcBef>
-              <a:defRPr sz="2400">
-                <a:solidFill>
-                  <a:srgbClr val="FACC15"/>
-                </a:solidFill>
-              </a:defRPr>
-            </a:pPr>
-            <a:r>
-              <a:t>Smart Roster Management &amp; Gemma 4 AI Clinical Platform</a:t>
+              <a:defRPr sz="2200" b="1">
+                <a:solidFill>
+                  <a:srgbClr val="F59E0B"/>
+                </a:solidFill>
+              </a:defRPr>
+            </a:pPr>
+            <a:r>
+              <a:t>Smart Roster Management &amp; Gemma 4 AI Clinical Training Platform</a:t>
             </a:r>
           </a:p>
           <a:p>
             <a:pPr>
               <a:spcBef>
-                <a:spcPts val="2000"/>
+                <a:spcPts val="1600"/>
               </a:spcBef>
               <a:defRPr sz="1400">
                 <a:solidFill>
@@ -3210,7 +3229,7 @@
               </a:defRPr>
             </a:pPr>
             <a:r>
-              <a:t>A modern, full-stack healthcare solution built for hospital ward scheduling, AI patient roleplay simulation, and nurse wellness relaxation.</a:t>
+              <a:t>An enterprise full-stack healthcare solution combining automated duty scheduling, AI patient roleplay simulation, and nurse shift-break wellness lounge mini-games.</a:t>
             </a:r>
           </a:p>
         </p:txBody>
@@ -3223,8 +3242,8 @@
         </p:nvSpPr>
         <p:spPr>
           <a:xfrm>
-            <a:off x="1097280" y="5303520"/>
-            <a:ext cx="9144000" cy="914400"/>
+            <a:off x="1554480" y="4389120"/>
+            <a:ext cx="9144000" cy="731520"/>
           </a:xfrm>
           <a:prstGeom prst="rect">
             <a:avLst/>
@@ -3232,20 +3251,55 @@
           <a:noFill/>
         </p:spPr>
         <p:txBody>
-          <a:bodyPr wrap="none">
+          <a:bodyPr wrap="square">
             <a:spAutoFit/>
           </a:bodyPr>
           <a:lstStyle/>
           <a:p>
             <a:pPr>
-              <a:defRPr sz="1200">
+              <a:defRPr sz="1200" b="1">
+                <a:solidFill>
+                  <a:srgbClr val="FFFFFF"/>
+                </a:solidFill>
+              </a:defRPr>
+            </a:pPr>
+            <a:r>
+              <a:t>✦ React 18 &amp; Vite   ✦ Node.js &amp; Express   ✦ Prisma ORM &amp; SQLite   ✦ Gemma 4 AI Engine   ✦ Socket.IO Push</a:t>
+            </a:r>
+          </a:p>
+        </p:txBody>
+      </p:sp>
+      <p:sp>
+        <p:nvSpPr>
+          <p:cNvPr id="5" name="TextBox 4"/>
+          <p:cNvSpPr txBox="1"/>
+          <p:nvPr/>
+        </p:nvSpPr>
+        <p:spPr>
+          <a:xfrm>
+            <a:off x="1097280" y="5943600"/>
+            <a:ext cx="10058400" cy="457200"/>
+          </a:xfrm>
+          <a:prstGeom prst="rect">
+            <a:avLst/>
+          </a:prstGeom>
+          <a:noFill/>
+        </p:spPr>
+        <p:txBody>
+          <a:bodyPr wrap="square">
+            <a:spAutoFit/>
+          </a:bodyPr>
+          <a:lstStyle/>
+          <a:p>
+            <a:pPr>
+              <a:defRPr sz="1100">
                 <a:solidFill>
                   <a:srgbClr val="707080"/>
                 </a:solidFill>
               </a:defRPr>
             </a:pPr>
             <a:r>
-              <a:t>Arbisoft-GDG Hackathon 2026  |  GitHub: Sagheer1122/Arbisoft-GDG-Hackathon</a:t>
+              <a:t>GitHub: Sagheer1122/Arbisoft-GDG-Hackathon  |  Live App: http://localhost:5173</a:t>
             </a:r>
           </a:p>
         </p:txBody>
@@ -3259,6 +3313,771 @@
 </file>
 
 <file path=ppt/slides/slide10.xml><?xml version="1.0" encoding="utf-8"?>
+<p:sld xmlns:a="http://schemas.openxmlformats.org/drawingml/2006/main" xmlns:p="http://schemas.openxmlformats.org/presentationml/2006/main" xmlns:r="http://schemas.openxmlformats.org/officeDocument/2006/relationships">
+  <p:cSld>
+    <p:spTree>
+      <p:nvGrpSpPr>
+        <p:cNvPr id="1" name=""/>
+        <p:cNvGrpSpPr/>
+        <p:nvPr/>
+      </p:nvGrpSpPr>
+      <p:grpSpPr/>
+      <p:sp>
+        <p:nvSpPr>
+          <p:cNvPr id="2" name="Rectangle 1"/>
+          <p:cNvSpPr/>
+          <p:nvPr/>
+        </p:nvSpPr>
+        <p:spPr>
+          <a:xfrm>
+            <a:off x="731520" y="365760"/>
+            <a:ext cx="10728655" cy="36576"/>
+          </a:xfrm>
+          <a:prstGeom prst="rect">
+            <a:avLst/>
+          </a:prstGeom>
+          <a:solidFill>
+            <a:srgbClr val="5142C5"/>
+          </a:solidFill>
+          <a:ln>
+            <a:noFill/>
+          </a:ln>
+        </p:spPr>
+        <p:style>
+          <a:lnRef idx="1">
+            <a:schemeClr val="accent1"/>
+          </a:lnRef>
+          <a:fillRef idx="3">
+            <a:schemeClr val="accent1"/>
+          </a:fillRef>
+          <a:effectRef idx="2">
+            <a:schemeClr val="accent1"/>
+          </a:effectRef>
+          <a:fontRef idx="minor">
+            <a:schemeClr val="lt1"/>
+          </a:fontRef>
+        </p:style>
+        <p:txBody>
+          <a:bodyPr rtlCol="0" anchor="ctr"/>
+          <a:lstStyle/>
+          <a:p>
+            <a:pPr algn="ctr"/>
+          </a:p>
+        </p:txBody>
+      </p:sp>
+      <p:sp>
+        <p:nvSpPr>
+          <p:cNvPr id="3" name="TextBox 2"/>
+          <p:cNvSpPr txBox="1"/>
+          <p:nvPr/>
+        </p:nvSpPr>
+        <p:spPr>
+          <a:xfrm>
+            <a:off x="731520" y="457200"/>
+            <a:ext cx="7315200" cy="320040"/>
+          </a:xfrm>
+          <a:prstGeom prst="rect">
+            <a:avLst/>
+          </a:prstGeom>
+          <a:noFill/>
+        </p:spPr>
+        <p:txBody>
+          <a:bodyPr wrap="square">
+            <a:spAutoFit/>
+          </a:bodyPr>
+          <a:lstStyle/>
+          <a:p>
+            <a:pPr>
+              <a:defRPr sz="1000" b="1">
+                <a:solidFill>
+                  <a:srgbClr val="5142C5"/>
+                </a:solidFill>
+              </a:defRPr>
+            </a:pPr>
+            <a:r>
+              <a:t>NURSEFLOW ENTERPRISE PLATFORM</a:t>
+            </a:r>
+          </a:p>
+        </p:txBody>
+      </p:sp>
+      <p:sp>
+        <p:nvSpPr>
+          <p:cNvPr id="4" name="TextBox 3"/>
+          <p:cNvSpPr txBox="1"/>
+          <p:nvPr/>
+        </p:nvSpPr>
+        <p:spPr>
+          <a:xfrm>
+            <a:off x="731520" y="731520"/>
+            <a:ext cx="10728655" cy="640080"/>
+          </a:xfrm>
+          <a:prstGeom prst="rect">
+            <a:avLst/>
+          </a:prstGeom>
+          <a:noFill/>
+        </p:spPr>
+        <p:txBody>
+          <a:bodyPr wrap="square">
+            <a:spAutoFit/>
+          </a:bodyPr>
+          <a:lstStyle/>
+          <a:p>
+            <a:pPr>
+              <a:defRPr sz="2400" b="1">
+                <a:solidFill>
+                  <a:srgbClr val="16162A"/>
+                </a:solidFill>
+              </a:defRPr>
+            </a:pPr>
+            <a:r>
+              <a:t>Complete Backend REST API Infrastructure</a:t>
+            </a:r>
+          </a:p>
+        </p:txBody>
+      </p:sp>
+      <p:sp>
+        <p:nvSpPr>
+          <p:cNvPr id="5" name="TextBox 4"/>
+          <p:cNvSpPr txBox="1"/>
+          <p:nvPr/>
+        </p:nvSpPr>
+        <p:spPr>
+          <a:xfrm>
+            <a:off x="731520" y="6400800"/>
+            <a:ext cx="10728655" cy="365760"/>
+          </a:xfrm>
+          <a:prstGeom prst="rect">
+            <a:avLst/>
+          </a:prstGeom>
+          <a:noFill/>
+        </p:spPr>
+        <p:txBody>
+          <a:bodyPr wrap="square">
+            <a:spAutoFit/>
+          </a:bodyPr>
+          <a:lstStyle/>
+          <a:p>
+            <a:pPr>
+              <a:defRPr sz="900">
+                <a:solidFill>
+                  <a:srgbClr val="707080"/>
+                </a:solidFill>
+              </a:defRPr>
+            </a:pPr>
+            <a:r>
+              <a:t>NurseFlow Platform Presentation  |  Slide 10 of 12  |  Arbisoft-GDG Hackathon 2026</a:t>
+            </a:r>
+          </a:p>
+        </p:txBody>
+      </p:sp>
+      <p:sp>
+        <p:nvSpPr>
+          <p:cNvPr id="6" name="Rounded Rectangle 5"/>
+          <p:cNvSpPr/>
+          <p:nvPr/>
+        </p:nvSpPr>
+        <p:spPr>
+          <a:xfrm>
+            <a:off x="731520" y="1463040"/>
+            <a:ext cx="10728655" cy="685800"/>
+          </a:xfrm>
+          <a:prstGeom prst="roundRect">
+            <a:avLst/>
+          </a:prstGeom>
+          <a:solidFill>
+            <a:srgbClr val="EDE9FE"/>
+          </a:solidFill>
+          <a:ln>
+            <a:solidFill>
+              <a:srgbClr val="5142C5"/>
+            </a:solidFill>
+          </a:ln>
+        </p:spPr>
+        <p:style>
+          <a:lnRef idx="1">
+            <a:schemeClr val="accent1"/>
+          </a:lnRef>
+          <a:fillRef idx="3">
+            <a:schemeClr val="accent1"/>
+          </a:fillRef>
+          <a:effectRef idx="2">
+            <a:schemeClr val="accent1"/>
+          </a:effectRef>
+          <a:fontRef idx="minor">
+            <a:schemeClr val="lt1"/>
+          </a:fontRef>
+        </p:style>
+        <p:txBody>
+          <a:bodyPr rtlCol="0" anchor="ctr" wrap="square" lIns="182880" tIns="109728"/>
+          <a:lstStyle/>
+          <a:p>
+            <a:pPr algn="ctr">
+              <a:defRPr sz="1300" b="1">
+                <a:solidFill>
+                  <a:srgbClr val="16162A"/>
+                </a:solidFill>
+              </a:defRPr>
+            </a:pPr>
+            <a:r>
+              <a:t>Authentication (/api/auth)  ➔  POST /login, POST /register, GET /me</a:t>
+            </a:r>
+          </a:p>
+        </p:txBody>
+      </p:sp>
+      <p:sp>
+        <p:nvSpPr>
+          <p:cNvPr id="7" name="Rounded Rectangle 6"/>
+          <p:cNvSpPr/>
+          <p:nvPr/>
+        </p:nvSpPr>
+        <p:spPr>
+          <a:xfrm>
+            <a:off x="731520" y="2240280"/>
+            <a:ext cx="10728655" cy="685800"/>
+          </a:xfrm>
+          <a:prstGeom prst="roundRect">
+            <a:avLst/>
+          </a:prstGeom>
+          <a:solidFill>
+            <a:srgbClr val="EDE9FE"/>
+          </a:solidFill>
+          <a:ln>
+            <a:solidFill>
+              <a:srgbClr val="5142C5"/>
+            </a:solidFill>
+          </a:ln>
+        </p:spPr>
+        <p:style>
+          <a:lnRef idx="1">
+            <a:schemeClr val="accent1"/>
+          </a:lnRef>
+          <a:fillRef idx="3">
+            <a:schemeClr val="accent1"/>
+          </a:fillRef>
+          <a:effectRef idx="2">
+            <a:schemeClr val="accent1"/>
+          </a:effectRef>
+          <a:fontRef idx="minor">
+            <a:schemeClr val="lt1"/>
+          </a:fontRef>
+        </p:style>
+        <p:txBody>
+          <a:bodyPr rtlCol="0" anchor="ctr" wrap="square" lIns="182880" tIns="109728"/>
+          <a:lstStyle/>
+          <a:p>
+            <a:pPr algn="ctr">
+              <a:defRPr sz="1300" b="1">
+                <a:solidFill>
+                  <a:srgbClr val="16162A"/>
+                </a:solidFill>
+              </a:defRPr>
+            </a:pPr>
+            <a:r>
+              <a:t>Staff Management (/api/users)  ➔  GET /, GET /:id, PATCH /:id</a:t>
+            </a:r>
+          </a:p>
+        </p:txBody>
+      </p:sp>
+      <p:sp>
+        <p:nvSpPr>
+          <p:cNvPr id="8" name="Rounded Rectangle 7"/>
+          <p:cNvSpPr/>
+          <p:nvPr/>
+        </p:nvSpPr>
+        <p:spPr>
+          <a:xfrm>
+            <a:off x="731520" y="3017520"/>
+            <a:ext cx="10728655" cy="685800"/>
+          </a:xfrm>
+          <a:prstGeom prst="roundRect">
+            <a:avLst/>
+          </a:prstGeom>
+          <a:solidFill>
+            <a:srgbClr val="EDE9FE"/>
+          </a:solidFill>
+          <a:ln>
+            <a:solidFill>
+              <a:srgbClr val="5142C5"/>
+            </a:solidFill>
+          </a:ln>
+        </p:spPr>
+        <p:style>
+          <a:lnRef idx="1">
+            <a:schemeClr val="accent1"/>
+          </a:lnRef>
+          <a:fillRef idx="3">
+            <a:schemeClr val="accent1"/>
+          </a:fillRef>
+          <a:effectRef idx="2">
+            <a:schemeClr val="accent1"/>
+          </a:effectRef>
+          <a:fontRef idx="minor">
+            <a:schemeClr val="lt1"/>
+          </a:fontRef>
+        </p:style>
+        <p:txBody>
+          <a:bodyPr rtlCol="0" anchor="ctr" wrap="square" lIns="182880" tIns="109728"/>
+          <a:lstStyle/>
+          <a:p>
+            <a:pPr algn="ctr">
+              <a:defRPr sz="1300" b="1">
+                <a:solidFill>
+                  <a:srgbClr val="16162A"/>
+                </a:solidFill>
+              </a:defRPr>
+            </a:pPr>
+            <a:r>
+              <a:t>Duty Rosters (/api/rosters)  ➔  GET /, POST /, PATCH /:id, DELETE /:id</a:t>
+            </a:r>
+          </a:p>
+        </p:txBody>
+      </p:sp>
+      <p:sp>
+        <p:nvSpPr>
+          <p:cNvPr id="9" name="Rounded Rectangle 8"/>
+          <p:cNvSpPr/>
+          <p:nvPr/>
+        </p:nvSpPr>
+        <p:spPr>
+          <a:xfrm>
+            <a:off x="731520" y="3794760"/>
+            <a:ext cx="10728655" cy="685800"/>
+          </a:xfrm>
+          <a:prstGeom prst="roundRect">
+            <a:avLst/>
+          </a:prstGeom>
+          <a:solidFill>
+            <a:srgbClr val="EDE9FE"/>
+          </a:solidFill>
+          <a:ln>
+            <a:solidFill>
+              <a:srgbClr val="5142C5"/>
+            </a:solidFill>
+          </a:ln>
+        </p:spPr>
+        <p:style>
+          <a:lnRef idx="1">
+            <a:schemeClr val="accent1"/>
+          </a:lnRef>
+          <a:fillRef idx="3">
+            <a:schemeClr val="accent1"/>
+          </a:fillRef>
+          <a:effectRef idx="2">
+            <a:schemeClr val="accent1"/>
+          </a:effectRef>
+          <a:fontRef idx="minor">
+            <a:schemeClr val="lt1"/>
+          </a:fontRef>
+        </p:style>
+        <p:txBody>
+          <a:bodyPr rtlCol="0" anchor="ctr" wrap="square" lIns="182880" tIns="109728"/>
+          <a:lstStyle/>
+          <a:p>
+            <a:pPr algn="ctr">
+              <a:defRPr sz="1300" b="1">
+                <a:solidFill>
+                  <a:srgbClr val="16162A"/>
+                </a:solidFill>
+              </a:defRPr>
+            </a:pPr>
+            <a:r>
+              <a:t>Leave &amp; Swaps (/api/leave-requests &amp; /api/shift-swaps)  ➔  GET /, POST /, PATCH /:id/approve, PATCH /:id/reject</a:t>
+            </a:r>
+          </a:p>
+        </p:txBody>
+      </p:sp>
+      <p:sp>
+        <p:nvSpPr>
+          <p:cNvPr id="10" name="Rounded Rectangle 9"/>
+          <p:cNvSpPr/>
+          <p:nvPr/>
+        </p:nvSpPr>
+        <p:spPr>
+          <a:xfrm>
+            <a:off x="731520" y="4572000"/>
+            <a:ext cx="10728655" cy="685800"/>
+          </a:xfrm>
+          <a:prstGeom prst="roundRect">
+            <a:avLst/>
+          </a:prstGeom>
+          <a:solidFill>
+            <a:srgbClr val="EDE9FE"/>
+          </a:solidFill>
+          <a:ln>
+            <a:solidFill>
+              <a:srgbClr val="5142C5"/>
+            </a:solidFill>
+          </a:ln>
+        </p:spPr>
+        <p:style>
+          <a:lnRef idx="1">
+            <a:schemeClr val="accent1"/>
+          </a:lnRef>
+          <a:fillRef idx="3">
+            <a:schemeClr val="accent1"/>
+          </a:fillRef>
+          <a:effectRef idx="2">
+            <a:schemeClr val="accent1"/>
+          </a:effectRef>
+          <a:fontRef idx="minor">
+            <a:schemeClr val="lt1"/>
+          </a:fontRef>
+        </p:style>
+        <p:txBody>
+          <a:bodyPr rtlCol="0" anchor="ctr" wrap="square" lIns="182880" tIns="109728"/>
+          <a:lstStyle/>
+          <a:p>
+            <a:pPr algn="ctr">
+              <a:defRPr sz="1300" b="1">
+                <a:solidFill>
+                  <a:srgbClr val="16162A"/>
+                </a:solidFill>
+              </a:defRPr>
+            </a:pPr>
+            <a:r>
+              <a:t>AI Patient Simulator (/api/communication-simulator)  ➔  GET /scenarios, POST /sessions, POST /messages, POST /end</a:t>
+            </a:r>
+          </a:p>
+        </p:txBody>
+      </p:sp>
+      <p:sp>
+        <p:nvSpPr>
+          <p:cNvPr id="11" name="Rounded Rectangle 10"/>
+          <p:cNvSpPr/>
+          <p:nvPr/>
+        </p:nvSpPr>
+        <p:spPr>
+          <a:xfrm>
+            <a:off x="731520" y="5349240"/>
+            <a:ext cx="10728655" cy="685800"/>
+          </a:xfrm>
+          <a:prstGeom prst="roundRect">
+            <a:avLst/>
+          </a:prstGeom>
+          <a:solidFill>
+            <a:srgbClr val="EDE9FE"/>
+          </a:solidFill>
+          <a:ln>
+            <a:solidFill>
+              <a:srgbClr val="5142C5"/>
+            </a:solidFill>
+          </a:ln>
+        </p:spPr>
+        <p:style>
+          <a:lnRef idx="1">
+            <a:schemeClr val="accent1"/>
+          </a:lnRef>
+          <a:fillRef idx="3">
+            <a:schemeClr val="accent1"/>
+          </a:fillRef>
+          <a:effectRef idx="2">
+            <a:schemeClr val="accent1"/>
+          </a:effectRef>
+          <a:fontRef idx="minor">
+            <a:schemeClr val="lt1"/>
+          </a:fontRef>
+        </p:style>
+        <p:txBody>
+          <a:bodyPr rtlCol="0" anchor="ctr" wrap="square" lIns="182880" tIns="109728"/>
+          <a:lstStyle/>
+          <a:p>
+            <a:pPr algn="ctr">
+              <a:defRPr sz="1300" b="1">
+                <a:solidFill>
+                  <a:srgbClr val="16162A"/>
+                </a:solidFill>
+              </a:defRPr>
+            </a:pPr>
+            <a:r>
+              <a:t>AI Break Games (/api/games)  ➔  POST /tic-tac-toe/move, POST /tic-tac-toe/score, GET /score</a:t>
+            </a:r>
+          </a:p>
+        </p:txBody>
+      </p:sp>
+    </p:spTree>
+  </p:cSld>
+  <p:clrMapOvr>
+    <a:masterClrMapping/>
+  </p:clrMapOvr>
+</p:sld>
+</file>
+
+<file path=ppt/slides/slide11.xml><?xml version="1.0" encoding="utf-8"?>
+<p:sld xmlns:a="http://schemas.openxmlformats.org/drawingml/2006/main" xmlns:p="http://schemas.openxmlformats.org/presentationml/2006/main" xmlns:r="http://schemas.openxmlformats.org/officeDocument/2006/relationships">
+  <p:cSld>
+    <p:spTree>
+      <p:nvGrpSpPr>
+        <p:cNvPr id="1" name=""/>
+        <p:cNvGrpSpPr/>
+        <p:nvPr/>
+      </p:nvGrpSpPr>
+      <p:grpSpPr/>
+      <p:sp>
+        <p:nvSpPr>
+          <p:cNvPr id="2" name="Rectangle 1"/>
+          <p:cNvSpPr/>
+          <p:nvPr/>
+        </p:nvSpPr>
+        <p:spPr>
+          <a:xfrm>
+            <a:off x="731520" y="365760"/>
+            <a:ext cx="10728655" cy="36576"/>
+          </a:xfrm>
+          <a:prstGeom prst="rect">
+            <a:avLst/>
+          </a:prstGeom>
+          <a:solidFill>
+            <a:srgbClr val="5142C5"/>
+          </a:solidFill>
+          <a:ln>
+            <a:noFill/>
+          </a:ln>
+        </p:spPr>
+        <p:style>
+          <a:lnRef idx="1">
+            <a:schemeClr val="accent1"/>
+          </a:lnRef>
+          <a:fillRef idx="3">
+            <a:schemeClr val="accent1"/>
+          </a:fillRef>
+          <a:effectRef idx="2">
+            <a:schemeClr val="accent1"/>
+          </a:effectRef>
+          <a:fontRef idx="minor">
+            <a:schemeClr val="lt1"/>
+          </a:fontRef>
+        </p:style>
+        <p:txBody>
+          <a:bodyPr rtlCol="0" anchor="ctr"/>
+          <a:lstStyle/>
+          <a:p>
+            <a:pPr algn="ctr"/>
+          </a:p>
+        </p:txBody>
+      </p:sp>
+      <p:sp>
+        <p:nvSpPr>
+          <p:cNvPr id="3" name="TextBox 2"/>
+          <p:cNvSpPr txBox="1"/>
+          <p:nvPr/>
+        </p:nvSpPr>
+        <p:spPr>
+          <a:xfrm>
+            <a:off x="731520" y="457200"/>
+            <a:ext cx="7315200" cy="320040"/>
+          </a:xfrm>
+          <a:prstGeom prst="rect">
+            <a:avLst/>
+          </a:prstGeom>
+          <a:noFill/>
+        </p:spPr>
+        <p:txBody>
+          <a:bodyPr wrap="square">
+            <a:spAutoFit/>
+          </a:bodyPr>
+          <a:lstStyle/>
+          <a:p>
+            <a:pPr>
+              <a:defRPr sz="1000" b="1">
+                <a:solidFill>
+                  <a:srgbClr val="5142C5"/>
+                </a:solidFill>
+              </a:defRPr>
+            </a:pPr>
+            <a:r>
+              <a:t>NURSEFLOW ENTERPRISE PLATFORM</a:t>
+            </a:r>
+          </a:p>
+        </p:txBody>
+      </p:sp>
+      <p:sp>
+        <p:nvSpPr>
+          <p:cNvPr id="4" name="TextBox 3"/>
+          <p:cNvSpPr txBox="1"/>
+          <p:nvPr/>
+        </p:nvSpPr>
+        <p:spPr>
+          <a:xfrm>
+            <a:off x="731520" y="731520"/>
+            <a:ext cx="10728655" cy="640080"/>
+          </a:xfrm>
+          <a:prstGeom prst="rect">
+            <a:avLst/>
+          </a:prstGeom>
+          <a:noFill/>
+        </p:spPr>
+        <p:txBody>
+          <a:bodyPr wrap="square">
+            <a:spAutoFit/>
+          </a:bodyPr>
+          <a:lstStyle/>
+          <a:p>
+            <a:pPr>
+              <a:defRPr sz="2400" b="1">
+                <a:solidFill>
+                  <a:srgbClr val="16162A"/>
+                </a:solidFill>
+              </a:defRPr>
+            </a:pPr>
+            <a:r>
+              <a:t>Glassmorphic Design System &amp; Photorealistic Visuals</a:t>
+            </a:r>
+          </a:p>
+        </p:txBody>
+      </p:sp>
+      <p:sp>
+        <p:nvSpPr>
+          <p:cNvPr id="5" name="TextBox 4"/>
+          <p:cNvSpPr txBox="1"/>
+          <p:nvPr/>
+        </p:nvSpPr>
+        <p:spPr>
+          <a:xfrm>
+            <a:off x="731520" y="6400800"/>
+            <a:ext cx="10728655" cy="365760"/>
+          </a:xfrm>
+          <a:prstGeom prst="rect">
+            <a:avLst/>
+          </a:prstGeom>
+          <a:noFill/>
+        </p:spPr>
+        <p:txBody>
+          <a:bodyPr wrap="square">
+            <a:spAutoFit/>
+          </a:bodyPr>
+          <a:lstStyle/>
+          <a:p>
+            <a:pPr>
+              <a:defRPr sz="900">
+                <a:solidFill>
+                  <a:srgbClr val="707080"/>
+                </a:solidFill>
+              </a:defRPr>
+            </a:pPr>
+            <a:r>
+              <a:t>NurseFlow Platform Presentation  |  Slide 11 of 12  |  Arbisoft-GDG Hackathon 2026</a:t>
+            </a:r>
+          </a:p>
+        </p:txBody>
+      </p:sp>
+      <p:sp>
+        <p:nvSpPr>
+          <p:cNvPr id="6" name="Rounded Rectangle 5"/>
+          <p:cNvSpPr/>
+          <p:nvPr/>
+        </p:nvSpPr>
+        <p:spPr>
+          <a:xfrm>
+            <a:off x="731520" y="1463040"/>
+            <a:ext cx="10728655" cy="4572000"/>
+          </a:xfrm>
+          <a:prstGeom prst="roundRect">
+            <a:avLst/>
+          </a:prstGeom>
+          <a:solidFill>
+            <a:srgbClr val="16162A"/>
+          </a:solidFill>
+        </p:spPr>
+        <p:style>
+          <a:lnRef idx="1">
+            <a:schemeClr val="accent1"/>
+          </a:lnRef>
+          <a:fillRef idx="3">
+            <a:schemeClr val="accent1"/>
+          </a:fillRef>
+          <a:effectRef idx="2">
+            <a:schemeClr val="accent1"/>
+          </a:effectRef>
+          <a:fontRef idx="minor">
+            <a:schemeClr val="lt1"/>
+          </a:fontRef>
+        </p:style>
+        <p:txBody>
+          <a:bodyPr rtlCol="0" anchor="ctr" wrap="square" lIns="274320" tIns="274320"/>
+          <a:lstStyle/>
+          <a:p>
+            <a:pPr algn="ctr">
+              <a:defRPr sz="2000" b="1">
+                <a:solidFill>
+                  <a:srgbClr val="F59E0B"/>
+                </a:solidFill>
+              </a:defRPr>
+            </a:pPr>
+            <a:r>
+              <a:t>🎨 Premium Design Tokens &amp; Assets</a:t>
+            </a:r>
+          </a:p>
+          <a:p>
+            <a:pPr>
+              <a:spcBef>
+                <a:spcPts val="1200"/>
+              </a:spcBef>
+              <a:defRPr sz="1300">
+                <a:solidFill>
+                  <a:srgbClr val="FFFFFF"/>
+                </a:solidFill>
+              </a:defRPr>
+            </a:pPr>
+            <a:r>
+              <a:t>✓ Curated HSL Color Tokens: Deep Purple (#5142C5), Dark Navy Mesh (#16162A), Soft Light Purple Accent (#EDE9FE).</a:t>
+            </a:r>
+          </a:p>
+          <a:p>
+            <a:pPr>
+              <a:spcBef>
+                <a:spcPts val="1200"/>
+              </a:spcBef>
+              <a:defRPr sz="1300">
+                <a:solidFill>
+                  <a:srgbClr val="FFFFFF"/>
+                </a:solidFill>
+              </a:defRPr>
+            </a:pPr>
+            <a:r>
+              <a:t>✓ Glassmorphic Aesthetics: Liquid glass buttons (bg-white/15 backdrop-blur-md) and subtle scale hover micro-animations.</a:t>
+            </a:r>
+          </a:p>
+          <a:p>
+            <a:pPr>
+              <a:spcBef>
+                <a:spcPts val="1200"/>
+              </a:spcBef>
+              <a:defRPr sz="1300">
+                <a:solidFill>
+                  <a:srgbClr val="FFFFFF"/>
+                </a:solidFill>
+              </a:defRPr>
+            </a:pPr>
+            <a:r>
+              <a:t>✓ Photorealistic 8K Nurse Avatars: Generated realistic portraits of BOTH a female nurse wearing full hijab and a male nurse together side-by-side (no cartoon graphics).</a:t>
+            </a:r>
+          </a:p>
+          <a:p>
+            <a:pPr>
+              <a:spcBef>
+                <a:spcPts val="1200"/>
+              </a:spcBef>
+              <a:defRPr sz="1300">
+                <a:solidFill>
+                  <a:srgbClr val="FFFFFF"/>
+                </a:solidFill>
+              </a:defRPr>
+            </a:pPr>
+            <a:r>
+              <a:t>✓ Responsive Navigation: Responsive Sidebar, Topbar, and Mobile Bottom Nav bar across all viewports.</a:t>
+            </a:r>
+          </a:p>
+        </p:txBody>
+      </p:sp>
+    </p:spTree>
+  </p:cSld>
+  <p:clrMapOvr>
+    <a:masterClrMapping/>
+  </p:clrMapOvr>
+</p:sld>
+</file>
+
+<file path=ppt/slides/slide12.xml><?xml version="1.0" encoding="utf-8"?>
 <p:sld xmlns:a="http://schemas.openxmlformats.org/drawingml/2006/main" xmlns:p="http://schemas.openxmlformats.org/presentationml/2006/main" xmlns:r="http://schemas.openxmlformats.org/officeDocument/2006/relationships">
   <p:cSld>
     <p:bg>
@@ -3284,8 +4103,8 @@
         </p:nvSpPr>
         <p:spPr>
           <a:xfrm>
-            <a:off x="1097280" y="1828800"/>
-            <a:ext cx="10058400" cy="3657600"/>
+            <a:off x="1097280" y="1645920"/>
+            <a:ext cx="10058400" cy="4114800"/>
           </a:xfrm>
           <a:prstGeom prst="rect">
             <a:avLst/>
@@ -3293,20 +4112,20 @@
           <a:noFill/>
         </p:spPr>
         <p:txBody>
-          <a:bodyPr wrap="none">
+          <a:bodyPr wrap="square">
             <a:spAutoFit/>
           </a:bodyPr>
           <a:lstStyle/>
           <a:p>
             <a:pPr>
-              <a:defRPr sz="4000" b="1">
+              <a:defRPr sz="3600" b="1">
                 <a:solidFill>
                   <a:srgbClr val="FFFFFF"/>
                 </a:solidFill>
               </a:defRPr>
             </a:pPr>
             <a:r>
-              <a:t>Thank You! Questions &amp; Live Demo</a:t>
+              <a:t>Thank You! Q&amp;A &amp; Demonstration</a:t>
             </a:r>
           </a:p>
           <a:p>
@@ -3314,9 +4133,9 @@
               <a:spcBef>
                 <a:spcPts val="1000"/>
               </a:spcBef>
-              <a:defRPr sz="2000">
-                <a:solidFill>
-                  <a:srgbClr val="FACC15"/>
+              <a:defRPr sz="1800" b="1">
+                <a:solidFill>
+                  <a:srgbClr val="F59E0B"/>
                 </a:solidFill>
               </a:defRPr>
             </a:pPr>
@@ -3327,24 +4146,76 @@
           <a:p>
             <a:pPr>
               <a:spcBef>
-                <a:spcPts val="2000"/>
+                <a:spcPts val="1000"/>
               </a:spcBef>
-              <a:defRPr sz="1400">
+              <a:defRPr sz="1300">
                 <a:solidFill>
                   <a:srgbClr val="EDE9FE"/>
                 </a:solidFill>
               </a:defRPr>
             </a:pPr>
             <a:r>
-              <a:t>• Live Application: http://localhost:5173</a:t>
-            </a:r>
-            <a:br/>
+              <a:t>• Live Web Application: http://localhost:5173</a:t>
+            </a:r>
+          </a:p>
+          <a:p>
+            <a:pPr>
+              <a:spcBef>
+                <a:spcPts val="1000"/>
+              </a:spcBef>
+              <a:defRPr sz="1300">
+                <a:solidFill>
+                  <a:srgbClr val="EDE9FE"/>
+                </a:solidFill>
+              </a:defRPr>
+            </a:pPr>
             <a:r>
               <a:t>• GitHub Repository: https://github.com/Sagheer1122/Arbisoft-GDG-Hackathon.git</a:t>
             </a:r>
-            <a:br/>
-            <a:r>
-              <a:t>• API Documentation: API_DOCUMENTATION.md</a:t>
+          </a:p>
+          <a:p>
+            <a:pPr>
+              <a:spcBef>
+                <a:spcPts val="1000"/>
+              </a:spcBef>
+              <a:defRPr sz="1300">
+                <a:solidFill>
+                  <a:srgbClr val="EDE9FE"/>
+                </a:solidFill>
+              </a:defRPr>
+            </a:pPr>
+            <a:r>
+              <a:t>• Complete System PDF Manual: NurseFlow_Complete_Documentation.pdf</a:t>
+            </a:r>
+          </a:p>
+          <a:p>
+            <a:pPr>
+              <a:spcBef>
+                <a:spcPts val="1000"/>
+              </a:spcBef>
+              <a:defRPr sz="1300">
+                <a:solidFill>
+                  <a:srgbClr val="EDE9FE"/>
+                </a:solidFill>
+              </a:defRPr>
+            </a:pPr>
+            <a:r>
+              <a:t>• Kaggle Dataset Documentation: KAGGLE_DOCUMENTATION.md</a:t>
+            </a:r>
+          </a:p>
+          <a:p>
+            <a:pPr>
+              <a:spcBef>
+                <a:spcPts val="1000"/>
+              </a:spcBef>
+              <a:defRPr sz="1300">
+                <a:solidFill>
+                  <a:srgbClr val="EDE9FE"/>
+                </a:solidFill>
+              </a:defRPr>
+            </a:pPr>
+            <a:r>
+              <a:t>• REST API Documentation: API_DOCUMENTATION.md</a:t>
             </a:r>
           </a:p>
         </p:txBody>
@@ -3369,36 +4240,44 @@
       <p:grpSpPr/>
       <p:sp>
         <p:nvSpPr>
-          <p:cNvPr id="2" name="TextBox 1"/>
-          <p:cNvSpPr txBox="1"/>
+          <p:cNvPr id="2" name="Rectangle 1"/>
+          <p:cNvSpPr/>
           <p:nvPr/>
         </p:nvSpPr>
         <p:spPr>
           <a:xfrm>
             <a:off x="731520" y="365760"/>
-            <a:ext cx="7315200" cy="365760"/>
+            <a:ext cx="10728655" cy="36576"/>
           </a:xfrm>
           <a:prstGeom prst="rect">
             <a:avLst/>
           </a:prstGeom>
-          <a:noFill/>
-        </p:spPr>
-        <p:txBody>
-          <a:bodyPr wrap="none">
-            <a:spAutoFit/>
-          </a:bodyPr>
-          <a:lstStyle/>
-          <a:p>
-            <a:pPr>
-              <a:defRPr sz="1100" b="1">
-                <a:solidFill>
-                  <a:srgbClr val="5142C5"/>
-                </a:solidFill>
-              </a:defRPr>
-            </a:pPr>
-            <a:r>
-              <a:t>NURSEFLOW PLATFORM PRESENTATION</a:t>
-            </a:r>
+          <a:solidFill>
+            <a:srgbClr val="5142C5"/>
+          </a:solidFill>
+          <a:ln>
+            <a:noFill/>
+          </a:ln>
+        </p:spPr>
+        <p:style>
+          <a:lnRef idx="1">
+            <a:schemeClr val="accent1"/>
+          </a:lnRef>
+          <a:fillRef idx="3">
+            <a:schemeClr val="accent1"/>
+          </a:fillRef>
+          <a:effectRef idx="2">
+            <a:schemeClr val="accent1"/>
+          </a:effectRef>
+          <a:fontRef idx="minor">
+            <a:schemeClr val="lt1"/>
+          </a:fontRef>
+        </p:style>
+        <p:txBody>
+          <a:bodyPr rtlCol="0" anchor="ctr"/>
+          <a:lstStyle/>
+          <a:p>
+            <a:pPr algn="ctr"/>
           </a:p>
         </p:txBody>
       </p:sp>
@@ -3410,8 +4289,8 @@
         </p:nvSpPr>
         <p:spPr>
           <a:xfrm>
-            <a:off x="731520" y="640080"/>
-            <a:ext cx="10058400" cy="731520"/>
+            <a:off x="731520" y="457200"/>
+            <a:ext cx="7315200" cy="320040"/>
           </a:xfrm>
           <a:prstGeom prst="rect">
             <a:avLst/>
@@ -3419,34 +4298,104 @@
           <a:noFill/>
         </p:spPr>
         <p:txBody>
-          <a:bodyPr wrap="none">
+          <a:bodyPr wrap="square">
             <a:spAutoFit/>
           </a:bodyPr>
           <a:lstStyle/>
           <a:p>
             <a:pPr>
-              <a:defRPr sz="2600" b="1">
+              <a:defRPr sz="1000" b="1">
+                <a:solidFill>
+                  <a:srgbClr val="5142C5"/>
+                </a:solidFill>
+              </a:defRPr>
+            </a:pPr>
+            <a:r>
+              <a:t>NURSEFLOW ENTERPRISE PLATFORM</a:t>
+            </a:r>
+          </a:p>
+        </p:txBody>
+      </p:sp>
+      <p:sp>
+        <p:nvSpPr>
+          <p:cNvPr id="4" name="TextBox 3"/>
+          <p:cNvSpPr txBox="1"/>
+          <p:nvPr/>
+        </p:nvSpPr>
+        <p:spPr>
+          <a:xfrm>
+            <a:off x="731520" y="731520"/>
+            <a:ext cx="10728655" cy="640080"/>
+          </a:xfrm>
+          <a:prstGeom prst="rect">
+            <a:avLst/>
+          </a:prstGeom>
+          <a:noFill/>
+        </p:spPr>
+        <p:txBody>
+          <a:bodyPr wrap="square">
+            <a:spAutoFit/>
+          </a:bodyPr>
+          <a:lstStyle/>
+          <a:p>
+            <a:pPr>
+              <a:defRPr sz="2400" b="1">
                 <a:solidFill>
                   <a:srgbClr val="16162A"/>
                 </a:solidFill>
               </a:defRPr>
             </a:pPr>
             <a:r>
-              <a:t>Executive Vision: Overcoming Clinical Fatigue &amp; Scheduling Chaos</a:t>
-            </a:r>
-          </a:p>
-        </p:txBody>
-      </p:sp>
-      <p:sp>
-        <p:nvSpPr>
-          <p:cNvPr id="4" name="Rounded Rectangle 3"/>
+              <a:t>Executive Overview: Solving Healthcare Workforce Fatigue</a:t>
+            </a:r>
+          </a:p>
+        </p:txBody>
+      </p:sp>
+      <p:sp>
+        <p:nvSpPr>
+          <p:cNvPr id="5" name="TextBox 4"/>
+          <p:cNvSpPr txBox="1"/>
+          <p:nvPr/>
+        </p:nvSpPr>
+        <p:spPr>
+          <a:xfrm>
+            <a:off x="731520" y="6400800"/>
+            <a:ext cx="10728655" cy="365760"/>
+          </a:xfrm>
+          <a:prstGeom prst="rect">
+            <a:avLst/>
+          </a:prstGeom>
+          <a:noFill/>
+        </p:spPr>
+        <p:txBody>
+          <a:bodyPr wrap="square">
+            <a:spAutoFit/>
+          </a:bodyPr>
+          <a:lstStyle/>
+          <a:p>
+            <a:pPr>
+              <a:defRPr sz="900">
+                <a:solidFill>
+                  <a:srgbClr val="707080"/>
+                </a:solidFill>
+              </a:defRPr>
+            </a:pPr>
+            <a:r>
+              <a:t>NurseFlow Platform Presentation  |  Slide 2 of 12  |  Arbisoft-GDG Hackathon 2026</a:t>
+            </a:r>
+          </a:p>
+        </p:txBody>
+      </p:sp>
+      <p:sp>
+        <p:nvSpPr>
+          <p:cNvPr id="6" name="Rounded Rectangle 5"/>
           <p:cNvSpPr/>
           <p:nvPr/>
         </p:nvSpPr>
         <p:spPr>
           <a:xfrm>
-            <a:off x="731520" y="1645920"/>
-            <a:ext cx="5120640" cy="4389120"/>
+            <a:off x="731520" y="1463040"/>
+            <a:ext cx="5120640" cy="4572000"/>
           </a:xfrm>
           <a:prstGeom prst="roundRect">
             <a:avLst/>
@@ -3475,18 +4424,18 @@
           </a:fontRef>
         </p:style>
         <p:txBody>
-          <a:bodyPr rtlCol="0" anchor="ctr" wrap="square"/>
+          <a:bodyPr rtlCol="0" anchor="ctr" wrap="square" lIns="274320" tIns="274320"/>
           <a:lstStyle/>
           <a:p>
             <a:pPr algn="ctr">
-              <a:defRPr sz="2000" b="1">
+              <a:defRPr sz="1800" b="1">
                 <a:solidFill>
                   <a:srgbClr val="16162A"/>
                 </a:solidFill>
               </a:defRPr>
             </a:pPr>
             <a:r>
-              <a:t>🚨 Hospital Challenges</a:t>
+              <a:t>🚨 Critical Healthcare Challenges</a:t>
             </a:r>
           </a:p>
           <a:p>
@@ -3494,14 +4443,14 @@
               <a:spcBef>
                 <a:spcPts val="1000"/>
               </a:spcBef>
-              <a:defRPr sz="1300">
+              <a:defRPr sz="1200">
                 <a:solidFill>
                   <a:srgbClr val="16162A"/>
                 </a:solidFill>
               </a:defRPr>
             </a:pPr>
             <a:r>
-              <a:t>• Scheduling Conflicts: Overlapping shifts &amp; manual shift swap friction.</a:t>
+              <a:t>• Scheduling Friction: Shift collisions, manual swap delays, and text overlap on duty rosters.</a:t>
             </a:r>
           </a:p>
           <a:p>
@@ -3509,14 +4458,14 @@
               <a:spcBef>
                 <a:spcPts val="1000"/>
               </a:spcBef>
-              <a:defRPr sz="1300">
+              <a:defRPr sz="1200">
                 <a:solidFill>
                   <a:srgbClr val="16162A"/>
                 </a:solidFill>
               </a:defRPr>
             </a:pPr>
             <a:r>
-              <a:t>• Clinical Burnout: Nurses experience fatigue during long 12-hour duty shifts.</a:t>
+              <a:t>• Clinical Nurse Burnout: Exhaustion during intense 12-hour duty shifts with insufficient mental reset.</a:t>
             </a:r>
           </a:p>
           <a:p>
@@ -3524,14 +4473,14 @@
               <a:spcBef>
                 <a:spcPts val="1000"/>
               </a:spcBef>
-              <a:defRPr sz="1300">
+              <a:defRPr sz="1200">
                 <a:solidFill>
                   <a:srgbClr val="16162A"/>
                 </a:solidFill>
               </a:defRPr>
             </a:pPr>
             <a:r>
-              <a:t>• Communication Training Gap: Lack of realistic practice for difficult patient conversations (Anxious, Angry Family Members).</a:t>
+              <a:t>• Communication Practice Gap: Lack of realistic, safe scenarios for practicing high-stress patient interactions.</a:t>
             </a:r>
           </a:p>
           <a:p>
@@ -3539,28 +4488,28 @@
               <a:spcBef>
                 <a:spcPts val="1000"/>
               </a:spcBef>
-              <a:defRPr sz="1300">
+              <a:defRPr sz="1200">
                 <a:solidFill>
                   <a:srgbClr val="16162A"/>
                 </a:solidFill>
               </a:defRPr>
             </a:pPr>
             <a:r>
-              <a:t>• Delayed Communication: Slow alert broadcasts during emergency ward events.</a:t>
-            </a:r>
-          </a:p>
-        </p:txBody>
-      </p:sp>
-      <p:sp>
-        <p:nvSpPr>
-          <p:cNvPr id="5" name="Rounded Rectangle 4"/>
+              <a:t>• Communication Delays: Slow emergency alert broadcasts across hospital wards.</a:t>
+            </a:r>
+          </a:p>
+        </p:txBody>
+      </p:sp>
+      <p:sp>
+        <p:nvSpPr>
+          <p:cNvPr id="7" name="Rounded Rectangle 6"/>
           <p:cNvSpPr/>
           <p:nvPr/>
         </p:nvSpPr>
         <p:spPr>
           <a:xfrm>
-            <a:off x="6217920" y="1645920"/>
-            <a:ext cx="5120640" cy="4389120"/>
+            <a:off x="6217920" y="1463040"/>
+            <a:ext cx="5120640" cy="4572000"/>
           </a:xfrm>
           <a:prstGeom prst="roundRect">
             <a:avLst/>
@@ -3589,11 +4538,11 @@
           </a:fontRef>
         </p:style>
         <p:txBody>
-          <a:bodyPr rtlCol="0" anchor="ctr" wrap="square"/>
+          <a:bodyPr rtlCol="0" anchor="ctr" wrap="square" lIns="274320" tIns="274320"/>
           <a:lstStyle/>
           <a:p>
             <a:pPr algn="ctr">
-              <a:defRPr sz="2000" b="1">
+              <a:defRPr sz="1800" b="1">
                 <a:solidFill>
                   <a:srgbClr val="FFFFFF"/>
                 </a:solidFill>
@@ -3608,14 +4557,14 @@
               <a:spcBef>
                 <a:spcPts val="1000"/>
               </a:spcBef>
-              <a:defRPr sz="1300">
+              <a:defRPr sz="1200">
                 <a:solidFill>
                   <a:srgbClr val="FFFFFF"/>
                 </a:solidFill>
               </a:defRPr>
             </a:pPr>
             <a:r>
-              <a:t>✓ Automated Roster Intelligence: Color-coded shift schedules (Morning, Evening, Night).</a:t>
+              <a:t>✓ Smart Roster Intelligence: Color-coded shifts (Morning, Evening, Night) with zero text overlap.</a:t>
             </a:r>
           </a:p>
           <a:p>
@@ -3623,14 +4572,14 @@
               <a:spcBef>
                 <a:spcPts val="1000"/>
               </a:spcBef>
-              <a:defRPr sz="1300">
+              <a:defRPr sz="1200">
                 <a:solidFill>
                   <a:srgbClr val="FFFFFF"/>
                 </a:solidFill>
               </a:defRPr>
             </a:pPr>
             <a:r>
-              <a:t>✓ Gemma 4 AI Patient Simulator: Safe interactive roleplay scenarios with dynamic emotion tracking.</a:t>
+              <a:t>✓ Gemma 4 AI Patient Simulator: Educational roleplay scenarios with dynamic emotion tracking.</a:t>
             </a:r>
           </a:p>
           <a:p>
@@ -3638,14 +4587,14 @@
               <a:spcBef>
                 <a:spcPts val="1000"/>
               </a:spcBef>
-              <a:defRPr sz="1300">
+              <a:defRPr sz="1200">
                 <a:solidFill>
                   <a:srgbClr val="FFFFFF"/>
                 </a:solidFill>
               </a:defRPr>
             </a:pPr>
             <a:r>
-              <a:t>✓ Shift Break AI Games Lounge: 100% non-medical relaxation games (Tick &amp; Cross) for 10-min breaks.</a:t>
+              <a:t>✓ Shift Break Lounge Games: 100% non-medical relaxation games (Tick &amp; Cross) for 10-min breaks.</a:t>
             </a:r>
           </a:p>
           <a:p>
@@ -3653,14 +4602,14 @@
               <a:spcBef>
                 <a:spcPts val="1000"/>
               </a:spcBef>
-              <a:defRPr sz="1300">
+              <a:defRPr sz="1200">
                 <a:solidFill>
                   <a:srgbClr val="FFFFFF"/>
                 </a:solidFill>
               </a:defRPr>
             </a:pPr>
             <a:r>
-              <a:t>✓ Instant Push Notifications: Socket.IO real-time emergency broadcasts and shift swap approvals.</a:t>
+              <a:t>✓ Socket.IO Push Dispatch: Instant emergency ward broadcasts and 1-click swap approvals.</a:t>
             </a:r>
           </a:p>
         </p:txBody>
@@ -3685,36 +4634,44 @@
       <p:grpSpPr/>
       <p:sp>
         <p:nvSpPr>
-          <p:cNvPr id="2" name="TextBox 1"/>
-          <p:cNvSpPr txBox="1"/>
+          <p:cNvPr id="2" name="Rectangle 1"/>
+          <p:cNvSpPr/>
           <p:nvPr/>
         </p:nvSpPr>
         <p:spPr>
           <a:xfrm>
             <a:off x="731520" y="365760"/>
-            <a:ext cx="7315200" cy="365760"/>
+            <a:ext cx="10728655" cy="36576"/>
           </a:xfrm>
           <a:prstGeom prst="rect">
             <a:avLst/>
           </a:prstGeom>
-          <a:noFill/>
-        </p:spPr>
-        <p:txBody>
-          <a:bodyPr wrap="none">
-            <a:spAutoFit/>
-          </a:bodyPr>
-          <a:lstStyle/>
-          <a:p>
-            <a:pPr>
-              <a:defRPr sz="1100" b="1">
-                <a:solidFill>
-                  <a:srgbClr val="5142C5"/>
-                </a:solidFill>
-              </a:defRPr>
-            </a:pPr>
-            <a:r>
-              <a:t>NURSEFLOW PLATFORM PRESENTATION</a:t>
-            </a:r>
+          <a:solidFill>
+            <a:srgbClr val="5142C5"/>
+          </a:solidFill>
+          <a:ln>
+            <a:noFill/>
+          </a:ln>
+        </p:spPr>
+        <p:style>
+          <a:lnRef idx="1">
+            <a:schemeClr val="accent1"/>
+          </a:lnRef>
+          <a:fillRef idx="3">
+            <a:schemeClr val="accent1"/>
+          </a:fillRef>
+          <a:effectRef idx="2">
+            <a:schemeClr val="accent1"/>
+          </a:effectRef>
+          <a:fontRef idx="minor">
+            <a:schemeClr val="lt1"/>
+          </a:fontRef>
+        </p:style>
+        <p:txBody>
+          <a:bodyPr rtlCol="0" anchor="ctr"/>
+          <a:lstStyle/>
+          <a:p>
+            <a:pPr algn="ctr"/>
           </a:p>
         </p:txBody>
       </p:sp>
@@ -3726,8 +4683,8 @@
         </p:nvSpPr>
         <p:spPr>
           <a:xfrm>
-            <a:off x="731520" y="640080"/>
-            <a:ext cx="10058400" cy="731520"/>
+            <a:off x="731520" y="457200"/>
+            <a:ext cx="7315200" cy="320040"/>
           </a:xfrm>
           <a:prstGeom prst="rect">
             <a:avLst/>
@@ -3735,34 +4692,104 @@
           <a:noFill/>
         </p:spPr>
         <p:txBody>
-          <a:bodyPr wrap="none">
+          <a:bodyPr wrap="square">
             <a:spAutoFit/>
           </a:bodyPr>
           <a:lstStyle/>
           <a:p>
             <a:pPr>
-              <a:defRPr sz="2600" b="1">
+              <a:defRPr sz="1000" b="1">
+                <a:solidFill>
+                  <a:srgbClr val="5142C5"/>
+                </a:solidFill>
+              </a:defRPr>
+            </a:pPr>
+            <a:r>
+              <a:t>NURSEFLOW ENTERPRISE PLATFORM</a:t>
+            </a:r>
+          </a:p>
+        </p:txBody>
+      </p:sp>
+      <p:sp>
+        <p:nvSpPr>
+          <p:cNvPr id="4" name="TextBox 3"/>
+          <p:cNvSpPr txBox="1"/>
+          <p:nvPr/>
+        </p:nvSpPr>
+        <p:spPr>
+          <a:xfrm>
+            <a:off x="731520" y="731520"/>
+            <a:ext cx="10728655" cy="640080"/>
+          </a:xfrm>
+          <a:prstGeom prst="rect">
+            <a:avLst/>
+          </a:prstGeom>
+          <a:noFill/>
+        </p:spPr>
+        <p:txBody>
+          <a:bodyPr wrap="square">
+            <a:spAutoFit/>
+          </a:bodyPr>
+          <a:lstStyle/>
+          <a:p>
+            <a:pPr>
+              <a:defRPr sz="2400" b="1">
                 <a:solidFill>
                   <a:srgbClr val="16162A"/>
                 </a:solidFill>
               </a:defRPr>
             </a:pPr>
             <a:r>
-              <a:t>Technology Architecture &amp; Full-Stack Engine</a:t>
-            </a:r>
-          </a:p>
-        </p:txBody>
-      </p:sp>
-      <p:sp>
-        <p:nvSpPr>
-          <p:cNvPr id="4" name="Rounded Rectangle 3"/>
+              <a:t>System Architecture &amp; Full-Stack Technology Stack</a:t>
+            </a:r>
+          </a:p>
+        </p:txBody>
+      </p:sp>
+      <p:sp>
+        <p:nvSpPr>
+          <p:cNvPr id="5" name="TextBox 4"/>
+          <p:cNvSpPr txBox="1"/>
+          <p:nvPr/>
+        </p:nvSpPr>
+        <p:spPr>
+          <a:xfrm>
+            <a:off x="731520" y="6400800"/>
+            <a:ext cx="10728655" cy="365760"/>
+          </a:xfrm>
+          <a:prstGeom prst="rect">
+            <a:avLst/>
+          </a:prstGeom>
+          <a:noFill/>
+        </p:spPr>
+        <p:txBody>
+          <a:bodyPr wrap="square">
+            <a:spAutoFit/>
+          </a:bodyPr>
+          <a:lstStyle/>
+          <a:p>
+            <a:pPr>
+              <a:defRPr sz="900">
+                <a:solidFill>
+                  <a:srgbClr val="707080"/>
+                </a:solidFill>
+              </a:defRPr>
+            </a:pPr>
+            <a:r>
+              <a:t>NurseFlow Platform Presentation  |  Slide 3 of 12  |  Arbisoft-GDG Hackathon 2026</a:t>
+            </a:r>
+          </a:p>
+        </p:txBody>
+      </p:sp>
+      <p:sp>
+        <p:nvSpPr>
+          <p:cNvPr id="6" name="Rounded Rectangle 5"/>
           <p:cNvSpPr/>
           <p:nvPr/>
         </p:nvSpPr>
         <p:spPr>
           <a:xfrm>
-            <a:off x="731520" y="1645920"/>
-            <a:ext cx="10607040" cy="868680"/>
+            <a:off x="731520" y="1463040"/>
+            <a:ext cx="10728655" cy="822960"/>
           </a:xfrm>
           <a:prstGeom prst="roundRect">
             <a:avLst/>
@@ -3791,44 +4818,44 @@
           </a:fontRef>
         </p:style>
         <p:txBody>
-          <a:bodyPr rtlCol="0" anchor="ctr"/>
+          <a:bodyPr rtlCol="0" anchor="ctr" wrap="square" lIns="182880" tIns="109728"/>
           <a:lstStyle/>
           <a:p>
             <a:pPr algn="ctr">
-              <a:defRPr sz="1600" b="1">
+              <a:defRPr sz="1500" b="1">
                 <a:solidFill>
                   <a:srgbClr val="16162A"/>
                 </a:solidFill>
               </a:defRPr>
             </a:pPr>
             <a:r>
-              <a:t>Frontend Application</a:t>
-            </a:r>
-          </a:p>
-          <a:p>
-            <a:pPr>
-              <a:defRPr sz="1200">
+              <a:t>Frontend Single-Page App</a:t>
+            </a:r>
+          </a:p>
+          <a:p>
+            <a:pPr>
+              <a:defRPr sz="1100">
                 <a:solidFill>
                   <a:srgbClr val="707080"/>
                 </a:solidFill>
               </a:defRPr>
             </a:pPr>
             <a:r>
-              <a:t>React 18 + Vite, TypeScript, Tailwind CSS, Lucide Icons, Glassmorphism UI</a:t>
-            </a:r>
-          </a:p>
-        </p:txBody>
-      </p:sp>
-      <p:sp>
-        <p:nvSpPr>
-          <p:cNvPr id="5" name="Rounded Rectangle 4"/>
+              <a:t>React 18 + Vite, TypeScript, Tailwind CSS, Lucide Icons, Glassmorphic Design System</a:t>
+            </a:r>
+          </a:p>
+        </p:txBody>
+      </p:sp>
+      <p:sp>
+        <p:nvSpPr>
+          <p:cNvPr id="7" name="Rounded Rectangle 6"/>
           <p:cNvSpPr/>
           <p:nvPr/>
         </p:nvSpPr>
         <p:spPr>
           <a:xfrm>
-            <a:off x="731520" y="2606040"/>
-            <a:ext cx="10607040" cy="868680"/>
+            <a:off x="731520" y="2395728"/>
+            <a:ext cx="10728655" cy="822960"/>
           </a:xfrm>
           <a:prstGeom prst="roundRect">
             <a:avLst/>
@@ -3857,44 +4884,44 @@
           </a:fontRef>
         </p:style>
         <p:txBody>
-          <a:bodyPr rtlCol="0" anchor="ctr"/>
+          <a:bodyPr rtlCol="0" anchor="ctr" wrap="square" lIns="182880" tIns="109728"/>
           <a:lstStyle/>
           <a:p>
             <a:pPr algn="ctr">
-              <a:defRPr sz="1600" b="1">
+              <a:defRPr sz="1500" b="1">
                 <a:solidFill>
                   <a:srgbClr val="16162A"/>
                 </a:solidFill>
               </a:defRPr>
             </a:pPr>
             <a:r>
-              <a:t>Backend Services</a:t>
-            </a:r>
-          </a:p>
-          <a:p>
-            <a:pPr>
-              <a:defRPr sz="1200">
+              <a:t>State Management &amp; Router</a:t>
+            </a:r>
+          </a:p>
+          <a:p>
+            <a:pPr>
+              <a:defRPr sz="1100">
                 <a:solidFill>
                   <a:srgbClr val="707080"/>
                 </a:solidFill>
               </a:defRPr>
             </a:pPr>
             <a:r>
-              <a:t>Node.js + Express, REST API Architecture, JWT Authentication, Bcrypt Hashing</a:t>
-            </a:r>
-          </a:p>
-        </p:txBody>
-      </p:sp>
-      <p:sp>
-        <p:nvSpPr>
-          <p:cNvPr id="6" name="Rounded Rectangle 5"/>
+              <a:t>React Context API (AuthContext, SocketContext), React Router v6 Guarded Routes</a:t>
+            </a:r>
+          </a:p>
+        </p:txBody>
+      </p:sp>
+      <p:sp>
+        <p:nvSpPr>
+          <p:cNvPr id="8" name="Rounded Rectangle 7"/>
           <p:cNvSpPr/>
           <p:nvPr/>
         </p:nvSpPr>
         <p:spPr>
           <a:xfrm>
-            <a:off x="731520" y="3566160"/>
-            <a:ext cx="10607040" cy="868680"/>
+            <a:off x="731520" y="3328416"/>
+            <a:ext cx="10728655" cy="822960"/>
           </a:xfrm>
           <a:prstGeom prst="roundRect">
             <a:avLst/>
@@ -3904,7 +4931,7 @@
           </a:solidFill>
           <a:ln w="25400">
             <a:solidFill>
-              <a:srgbClr val="39B879"/>
+              <a:srgbClr val="059669"/>
             </a:solidFill>
           </a:ln>
         </p:spPr>
@@ -3923,44 +4950,44 @@
           </a:fontRef>
         </p:style>
         <p:txBody>
-          <a:bodyPr rtlCol="0" anchor="ctr"/>
+          <a:bodyPr rtlCol="0" anchor="ctr" wrap="square" lIns="182880" tIns="109728"/>
           <a:lstStyle/>
           <a:p>
             <a:pPr algn="ctr">
-              <a:defRPr sz="1600" b="1">
+              <a:defRPr sz="1500" b="1">
                 <a:solidFill>
                   <a:srgbClr val="16162A"/>
                 </a:solidFill>
               </a:defRPr>
             </a:pPr>
             <a:r>
-              <a:t>Database &amp; ORM</a:t>
-            </a:r>
-          </a:p>
-          <a:p>
-            <a:pPr>
-              <a:defRPr sz="1200">
+              <a:t>Backend REST API</a:t>
+            </a:r>
+          </a:p>
+          <a:p>
+            <a:pPr>
+              <a:defRPr sz="1100">
                 <a:solidFill>
                   <a:srgbClr val="707080"/>
                 </a:solidFill>
               </a:defRPr>
             </a:pPr>
             <a:r>
-              <a:t>Prisma ORM with SQLite (dev.db), Seeded Scenarios &amp; Roster Tables</a:t>
-            </a:r>
-          </a:p>
-        </p:txBody>
-      </p:sp>
-      <p:sp>
-        <p:nvSpPr>
-          <p:cNvPr id="7" name="Rounded Rectangle 6"/>
+              <a:t>Node.js + Express Server, JWT Bearer Token Security, Bcrypt Password Hashing Middleware</a:t>
+            </a:r>
+          </a:p>
+        </p:txBody>
+      </p:sp>
+      <p:sp>
+        <p:nvSpPr>
+          <p:cNvPr id="9" name="Rounded Rectangle 8"/>
           <p:cNvSpPr/>
           <p:nvPr/>
         </p:nvSpPr>
         <p:spPr>
           <a:xfrm>
-            <a:off x="731520" y="4526280"/>
-            <a:ext cx="10607040" cy="868680"/>
+            <a:off x="731520" y="4261104"/>
+            <a:ext cx="10728655" cy="822960"/>
           </a:xfrm>
           <a:prstGeom prst="roundRect">
             <a:avLst/>
@@ -3989,44 +5016,44 @@
           </a:fontRef>
         </p:style>
         <p:txBody>
-          <a:bodyPr rtlCol="0" anchor="ctr"/>
+          <a:bodyPr rtlCol="0" anchor="ctr" wrap="square" lIns="182880" tIns="109728"/>
           <a:lstStyle/>
           <a:p>
             <a:pPr algn="ctr">
-              <a:defRPr sz="1600" b="1">
+              <a:defRPr sz="1500" b="1">
                 <a:solidFill>
                   <a:srgbClr val="16162A"/>
                 </a:solidFill>
               </a:defRPr>
             </a:pPr>
             <a:r>
-              <a:t>AI &amp; Machine Learning</a:t>
-            </a:r>
-          </a:p>
-          <a:p>
-            <a:pPr>
-              <a:defRPr sz="1200">
+              <a:t>Database &amp; Persistence</a:t>
+            </a:r>
+          </a:p>
+          <a:p>
+            <a:pPr>
+              <a:defRPr sz="1100">
                 <a:solidFill>
                   <a:srgbClr val="707080"/>
                 </a:solidFill>
               </a:defRPr>
             </a:pPr>
             <a:r>
-              <a:t>Gemma 4 AI Model Engine for Patient Roleplay &amp; Tic-Tac-Toe Minimax AI</a:t>
-            </a:r>
-          </a:p>
-        </p:txBody>
-      </p:sp>
-      <p:sp>
-        <p:nvSpPr>
-          <p:cNvPr id="8" name="Rounded Rectangle 7"/>
+              <a:t>Prisma ORM with SQLite (dev.db), Seeded Scenarios, Roster Tables, and User Schemas</a:t>
+            </a:r>
+          </a:p>
+        </p:txBody>
+      </p:sp>
+      <p:sp>
+        <p:nvSpPr>
+          <p:cNvPr id="10" name="Rounded Rectangle 9"/>
           <p:cNvSpPr/>
           <p:nvPr/>
         </p:nvSpPr>
         <p:spPr>
           <a:xfrm>
-            <a:off x="731520" y="5486400"/>
-            <a:ext cx="10607040" cy="868680"/>
+            <a:off x="731520" y="5193792"/>
+            <a:ext cx="10728655" cy="822960"/>
           </a:xfrm>
           <a:prstGeom prst="roundRect">
             <a:avLst/>
@@ -4036,7 +5063,7 @@
           </a:solidFill>
           <a:ln w="25400">
             <a:solidFill>
-              <a:srgbClr val="FACC15"/>
+              <a:srgbClr val="F59E0B"/>
             </a:solidFill>
           </a:ln>
         </p:spPr>
@@ -4055,30 +5082,30 @@
           </a:fontRef>
         </p:style>
         <p:txBody>
-          <a:bodyPr rtlCol="0" anchor="ctr"/>
+          <a:bodyPr rtlCol="0" anchor="ctr" wrap="square" lIns="182880" tIns="109728"/>
           <a:lstStyle/>
           <a:p>
             <a:pPr algn="ctr">
-              <a:defRPr sz="1600" b="1">
+              <a:defRPr sz="1500" b="1">
                 <a:solidFill>
                   <a:srgbClr val="16162A"/>
                 </a:solidFill>
               </a:defRPr>
             </a:pPr>
             <a:r>
-              <a:t>Real-time Push</a:t>
-            </a:r>
-          </a:p>
-          <a:p>
-            <a:pPr>
-              <a:defRPr sz="1200">
+              <a:t>Gemma 4 AI &amp; Real-Time Engine</a:t>
+            </a:r>
+          </a:p>
+          <a:p>
+            <a:pPr>
+              <a:defRPr sz="1100">
                 <a:solidFill>
                   <a:srgbClr val="707080"/>
                 </a:solidFill>
               </a:defRPr>
             </a:pPr>
             <a:r>
-              <a:t>Socket.IO for instant ward emergency broadcasts &amp; live notifications</a:t>
+              <a:t>Google Gemma 4 AI Roleplay Engine, 8-Score Analysis, Minimax Game AI, Socket.IO WebSockets</a:t>
             </a:r>
           </a:p>
         </p:txBody>
@@ -4103,36 +5130,44 @@
       <p:grpSpPr/>
       <p:sp>
         <p:nvSpPr>
-          <p:cNvPr id="2" name="TextBox 1"/>
-          <p:cNvSpPr txBox="1"/>
+          <p:cNvPr id="2" name="Rectangle 1"/>
+          <p:cNvSpPr/>
           <p:nvPr/>
         </p:nvSpPr>
         <p:spPr>
           <a:xfrm>
             <a:off x="731520" y="365760"/>
-            <a:ext cx="7315200" cy="365760"/>
+            <a:ext cx="10728655" cy="36576"/>
           </a:xfrm>
           <a:prstGeom prst="rect">
             <a:avLst/>
           </a:prstGeom>
-          <a:noFill/>
-        </p:spPr>
-        <p:txBody>
-          <a:bodyPr wrap="none">
-            <a:spAutoFit/>
-          </a:bodyPr>
-          <a:lstStyle/>
-          <a:p>
-            <a:pPr>
-              <a:defRPr sz="1100" b="1">
-                <a:solidFill>
-                  <a:srgbClr val="5142C5"/>
-                </a:solidFill>
-              </a:defRPr>
-            </a:pPr>
-            <a:r>
-              <a:t>NURSEFLOW PLATFORM PRESENTATION</a:t>
-            </a:r>
+          <a:solidFill>
+            <a:srgbClr val="5142C5"/>
+          </a:solidFill>
+          <a:ln>
+            <a:noFill/>
+          </a:ln>
+        </p:spPr>
+        <p:style>
+          <a:lnRef idx="1">
+            <a:schemeClr val="accent1"/>
+          </a:lnRef>
+          <a:fillRef idx="3">
+            <a:schemeClr val="accent1"/>
+          </a:fillRef>
+          <a:effectRef idx="2">
+            <a:schemeClr val="accent1"/>
+          </a:effectRef>
+          <a:fontRef idx="minor">
+            <a:schemeClr val="lt1"/>
+          </a:fontRef>
+        </p:style>
+        <p:txBody>
+          <a:bodyPr rtlCol="0" anchor="ctr"/>
+          <a:lstStyle/>
+          <a:p>
+            <a:pPr algn="ctr"/>
           </a:p>
         </p:txBody>
       </p:sp>
@@ -4144,8 +5179,8 @@
         </p:nvSpPr>
         <p:spPr>
           <a:xfrm>
-            <a:off x="731520" y="640080"/>
-            <a:ext cx="10058400" cy="731520"/>
+            <a:off x="731520" y="457200"/>
+            <a:ext cx="7315200" cy="320040"/>
           </a:xfrm>
           <a:prstGeom prst="rect">
             <a:avLst/>
@@ -4153,34 +5188,302 @@
           <a:noFill/>
         </p:spPr>
         <p:txBody>
-          <a:bodyPr wrap="none">
+          <a:bodyPr wrap="square">
             <a:spAutoFit/>
           </a:bodyPr>
           <a:lstStyle/>
           <a:p>
             <a:pPr>
-              <a:defRPr sz="2600" b="1">
+              <a:defRPr sz="1000" b="1">
+                <a:solidFill>
+                  <a:srgbClr val="5142C5"/>
+                </a:solidFill>
+              </a:defRPr>
+            </a:pPr>
+            <a:r>
+              <a:t>NURSEFLOW ENTERPRISE PLATFORM</a:t>
+            </a:r>
+          </a:p>
+        </p:txBody>
+      </p:sp>
+      <p:sp>
+        <p:nvSpPr>
+          <p:cNvPr id="4" name="TextBox 3"/>
+          <p:cNvSpPr txBox="1"/>
+          <p:nvPr/>
+        </p:nvSpPr>
+        <p:spPr>
+          <a:xfrm>
+            <a:off x="731520" y="731520"/>
+            <a:ext cx="10728655" cy="640080"/>
+          </a:xfrm>
+          <a:prstGeom prst="rect">
+            <a:avLst/>
+          </a:prstGeom>
+          <a:noFill/>
+        </p:spPr>
+        <p:txBody>
+          <a:bodyPr wrap="square">
+            <a:spAutoFit/>
+          </a:bodyPr>
+          <a:lstStyle/>
+          <a:p>
+            <a:pPr>
+              <a:defRPr sz="2400" b="1">
                 <a:solidFill>
                   <a:srgbClr val="16162A"/>
                 </a:solidFill>
               </a:defRPr>
             </a:pPr>
             <a:r>
-              <a:t>Feature 1: Weekly &amp; Monthly Roster Calendar View</a:t>
-            </a:r>
-          </a:p>
-        </p:txBody>
-      </p:sp>
-      <p:sp>
-        <p:nvSpPr>
-          <p:cNvPr id="4" name="Rounded Rectangle 3"/>
+              <a:t>Core Module 1: Smart Duty Roster Calendar Engine</a:t>
+            </a:r>
+          </a:p>
+        </p:txBody>
+      </p:sp>
+      <p:sp>
+        <p:nvSpPr>
+          <p:cNvPr id="5" name="TextBox 4"/>
+          <p:cNvSpPr txBox="1"/>
+          <p:nvPr/>
+        </p:nvSpPr>
+        <p:spPr>
+          <a:xfrm>
+            <a:off x="731520" y="6400800"/>
+            <a:ext cx="10728655" cy="365760"/>
+          </a:xfrm>
+          <a:prstGeom prst="rect">
+            <a:avLst/>
+          </a:prstGeom>
+          <a:noFill/>
+        </p:spPr>
+        <p:txBody>
+          <a:bodyPr wrap="square">
+            <a:spAutoFit/>
+          </a:bodyPr>
+          <a:lstStyle/>
+          <a:p>
+            <a:pPr>
+              <a:defRPr sz="900">
+                <a:solidFill>
+                  <a:srgbClr val="707080"/>
+                </a:solidFill>
+              </a:defRPr>
+            </a:pPr>
+            <a:r>
+              <a:t>NurseFlow Platform Presentation  |  Slide 4 of 12  |  Arbisoft-GDG Hackathon 2026</a:t>
+            </a:r>
+          </a:p>
+        </p:txBody>
+      </p:sp>
+      <p:sp>
+        <p:nvSpPr>
+          <p:cNvPr id="6" name="Rounded Rectangle 5"/>
           <p:cNvSpPr/>
           <p:nvPr/>
         </p:nvSpPr>
         <p:spPr>
           <a:xfrm>
-            <a:off x="731520" y="1645920"/>
-            <a:ext cx="10607040" cy="4389120"/>
+            <a:off x="731520" y="1463040"/>
+            <a:ext cx="2514600" cy="4572000"/>
+          </a:xfrm>
+          <a:prstGeom prst="roundRect">
+            <a:avLst/>
+          </a:prstGeom>
+          <a:solidFill>
+            <a:srgbClr val="FFFFFF"/>
+          </a:solidFill>
+          <a:ln w="25400">
+            <a:solidFill>
+              <a:srgbClr val="059669"/>
+            </a:solidFill>
+          </a:ln>
+        </p:spPr>
+        <p:style>
+          <a:lnRef idx="1">
+            <a:schemeClr val="accent1"/>
+          </a:lnRef>
+          <a:fillRef idx="3">
+            <a:schemeClr val="accent1"/>
+          </a:fillRef>
+          <a:effectRef idx="2">
+            <a:schemeClr val="accent1"/>
+          </a:effectRef>
+          <a:fontRef idx="minor">
+            <a:schemeClr val="lt1"/>
+          </a:fontRef>
+        </p:style>
+        <p:txBody>
+          <a:bodyPr rtlCol="0" anchor="ctr" wrap="square" lIns="137160" tIns="182880"/>
+          <a:lstStyle/>
+          <a:p>
+            <a:pPr algn="ctr">
+              <a:defRPr sz="1600" b="1">
+                <a:solidFill>
+                  <a:srgbClr val="059669"/>
+                </a:solidFill>
+              </a:defRPr>
+            </a:pPr>
+            <a:r>
+              <a:t>🌅 Morning Shift</a:t>
+            </a:r>
+          </a:p>
+          <a:p>
+            <a:pPr>
+              <a:spcBef>
+                <a:spcPts val="800"/>
+              </a:spcBef>
+              <a:defRPr sz="1200" b="1">
+                <a:solidFill>
+                  <a:srgbClr val="16162A"/>
+                </a:solidFill>
+              </a:defRPr>
+            </a:pPr>
+            <a:r>
+              <a:t>7:00 AM – 3:00 PM</a:t>
+            </a:r>
+          </a:p>
+          <a:p>
+            <a:pPr>
+              <a:spcBef>
+                <a:spcPts val="600"/>
+              </a:spcBef>
+              <a:defRPr sz="1000">
+                <a:solidFill>
+                  <a:srgbClr val="707080"/>
+                </a:solidFill>
+              </a:defRPr>
+            </a:pPr>
+            <a:r>
+              <a:t>Style: Soft Emerald Tint</a:t>
+            </a:r>
+          </a:p>
+          <a:p>
+            <a:pPr>
+              <a:spcBef>
+                <a:spcPts val="1200"/>
+              </a:spcBef>
+              <a:defRPr sz="1100">
+                <a:solidFill>
+                  <a:srgbClr val="16162A"/>
+                </a:solidFill>
+              </a:defRPr>
+            </a:pPr>
+            <a:r>
+              <a:t>Assigned to Ward Triage &amp; Morning Vitals</a:t>
+            </a:r>
+          </a:p>
+        </p:txBody>
+      </p:sp>
+      <p:sp>
+        <p:nvSpPr>
+          <p:cNvPr id="7" name="Rounded Rectangle 6"/>
+          <p:cNvSpPr/>
+          <p:nvPr/>
+        </p:nvSpPr>
+        <p:spPr>
+          <a:xfrm>
+            <a:off x="3456432" y="1463040"/>
+            <a:ext cx="2514600" cy="4572000"/>
+          </a:xfrm>
+          <a:prstGeom prst="roundRect">
+            <a:avLst/>
+          </a:prstGeom>
+          <a:solidFill>
+            <a:srgbClr val="FFFFFF"/>
+          </a:solidFill>
+          <a:ln w="25400">
+            <a:solidFill>
+              <a:srgbClr val="F59E0B"/>
+            </a:solidFill>
+          </a:ln>
+        </p:spPr>
+        <p:style>
+          <a:lnRef idx="1">
+            <a:schemeClr val="accent1"/>
+          </a:lnRef>
+          <a:fillRef idx="3">
+            <a:schemeClr val="accent1"/>
+          </a:fillRef>
+          <a:effectRef idx="2">
+            <a:schemeClr val="accent1"/>
+          </a:effectRef>
+          <a:fontRef idx="minor">
+            <a:schemeClr val="lt1"/>
+          </a:fontRef>
+        </p:style>
+        <p:txBody>
+          <a:bodyPr rtlCol="0" anchor="ctr" wrap="square" lIns="137160" tIns="182880"/>
+          <a:lstStyle/>
+          <a:p>
+            <a:pPr algn="ctr">
+              <a:defRPr sz="1600" b="1">
+                <a:solidFill>
+                  <a:srgbClr val="F59E0B"/>
+                </a:solidFill>
+              </a:defRPr>
+            </a:pPr>
+            <a:r>
+              <a:t>🌇 Evening Shift</a:t>
+            </a:r>
+          </a:p>
+          <a:p>
+            <a:pPr>
+              <a:spcBef>
+                <a:spcPts val="800"/>
+              </a:spcBef>
+              <a:defRPr sz="1200" b="1">
+                <a:solidFill>
+                  <a:srgbClr val="16162A"/>
+                </a:solidFill>
+              </a:defRPr>
+            </a:pPr>
+            <a:r>
+              <a:t>3:00 PM – 11:00 PM</a:t>
+            </a:r>
+          </a:p>
+          <a:p>
+            <a:pPr>
+              <a:spcBef>
+                <a:spcPts val="600"/>
+              </a:spcBef>
+              <a:defRPr sz="1000">
+                <a:solidFill>
+                  <a:srgbClr val="707080"/>
+                </a:solidFill>
+              </a:defRPr>
+            </a:pPr>
+            <a:r>
+              <a:t>Style: Soft Amber Tint</a:t>
+            </a:r>
+          </a:p>
+          <a:p>
+            <a:pPr>
+              <a:spcBef>
+                <a:spcPts val="1200"/>
+              </a:spcBef>
+              <a:defRPr sz="1100">
+                <a:solidFill>
+                  <a:srgbClr val="16162A"/>
+                </a:solidFill>
+              </a:defRPr>
+            </a:pPr>
+            <a:r>
+              <a:t>Ward Medication Rounds &amp; Intake</a:t>
+            </a:r>
+          </a:p>
+        </p:txBody>
+      </p:sp>
+      <p:sp>
+        <p:nvSpPr>
+          <p:cNvPr id="8" name="Rounded Rectangle 7"/>
+          <p:cNvSpPr/>
+          <p:nvPr/>
+        </p:nvSpPr>
+        <p:spPr>
+          <a:xfrm>
+            <a:off x="6181344" y="1463040"/>
+            <a:ext cx="2514600" cy="4572000"/>
           </a:xfrm>
           <a:prstGeom prst="roundRect">
             <a:avLst/>
@@ -4209,18 +5512,48 @@
           </a:fontRef>
         </p:style>
         <p:txBody>
-          <a:bodyPr rtlCol="0" anchor="ctr" wrap="square"/>
+          <a:bodyPr rtlCol="0" anchor="ctr" wrap="square" lIns="137160" tIns="182880"/>
           <a:lstStyle/>
           <a:p>
             <a:pPr algn="ctr">
-              <a:defRPr sz="2200" b="1">
+              <a:defRPr sz="1600" b="1">
                 <a:solidFill>
                   <a:srgbClr val="5142C5"/>
                 </a:solidFill>
               </a:defRPr>
             </a:pPr>
             <a:r>
-              <a:t>📅 Smart Duty Roster Features</a:t>
+              <a:t>🌙 Night Shift</a:t>
+            </a:r>
+          </a:p>
+          <a:p>
+            <a:pPr>
+              <a:spcBef>
+                <a:spcPts val="800"/>
+              </a:spcBef>
+              <a:defRPr sz="1200" b="1">
+                <a:solidFill>
+                  <a:srgbClr val="16162A"/>
+                </a:solidFill>
+              </a:defRPr>
+            </a:pPr>
+            <a:r>
+              <a:t>11:00 PM – 7:00 AM</a:t>
+            </a:r>
+          </a:p>
+          <a:p>
+            <a:pPr>
+              <a:spcBef>
+                <a:spcPts val="600"/>
+              </a:spcBef>
+              <a:defRPr sz="1000">
+                <a:solidFill>
+                  <a:srgbClr val="707080"/>
+                </a:solidFill>
+              </a:defRPr>
+            </a:pPr>
+            <a:r>
+              <a:t>Style: Soft Purple Tint</a:t>
             </a:r>
           </a:p>
           <a:p>
@@ -4228,14 +5561,98 @@
               <a:spcBef>
                 <a:spcPts val="1200"/>
               </a:spcBef>
-              <a:defRPr sz="1400">
+              <a:defRPr sz="1100">
                 <a:solidFill>
                   <a:srgbClr val="16162A"/>
                 </a:solidFill>
               </a:defRPr>
             </a:pPr>
             <a:r>
-              <a:t>• Spacious Card Layout: Re-architected weekly grid cards eliminating text collision.</a:t>
+              <a:t>Overnight Monitoring &amp; Vital Checks every 2 hrs</a:t>
+            </a:r>
+          </a:p>
+        </p:txBody>
+      </p:sp>
+      <p:sp>
+        <p:nvSpPr>
+          <p:cNvPr id="9" name="Rounded Rectangle 8"/>
+          <p:cNvSpPr/>
+          <p:nvPr/>
+        </p:nvSpPr>
+        <p:spPr>
+          <a:xfrm>
+            <a:off x="8906256" y="1463040"/>
+            <a:ext cx="2514600" cy="4572000"/>
+          </a:xfrm>
+          <a:prstGeom prst="roundRect">
+            <a:avLst/>
+          </a:prstGeom>
+          <a:solidFill>
+            <a:srgbClr val="FFFFFF"/>
+          </a:solidFill>
+          <a:ln w="25400">
+            <a:solidFill>
+              <a:srgbClr val="707080"/>
+            </a:solidFill>
+          </a:ln>
+        </p:spPr>
+        <p:style>
+          <a:lnRef idx="1">
+            <a:schemeClr val="accent1"/>
+          </a:lnRef>
+          <a:fillRef idx="3">
+            <a:schemeClr val="accent1"/>
+          </a:fillRef>
+          <a:effectRef idx="2">
+            <a:schemeClr val="accent1"/>
+          </a:effectRef>
+          <a:fontRef idx="minor">
+            <a:schemeClr val="lt1"/>
+          </a:fontRef>
+        </p:style>
+        <p:txBody>
+          <a:bodyPr rtlCol="0" anchor="ctr" wrap="square" lIns="137160" tIns="182880"/>
+          <a:lstStyle/>
+          <a:p>
+            <a:pPr algn="ctr">
+              <a:defRPr sz="1600" b="1">
+                <a:solidFill>
+                  <a:srgbClr val="707080"/>
+                </a:solidFill>
+              </a:defRPr>
+            </a:pPr>
+            <a:r>
+              <a:t>🏖️ Off Duty</a:t>
+            </a:r>
+          </a:p>
+          <a:p>
+            <a:pPr>
+              <a:spcBef>
+                <a:spcPts val="800"/>
+              </a:spcBef>
+              <a:defRPr sz="1200" b="1">
+                <a:solidFill>
+                  <a:srgbClr val="16162A"/>
+                </a:solidFill>
+              </a:defRPr>
+            </a:pPr>
+            <a:r>
+              <a:t>No Shift Scheduled</a:t>
+            </a:r>
+          </a:p>
+          <a:p>
+            <a:pPr>
+              <a:spcBef>
+                <a:spcPts val="600"/>
+              </a:spcBef>
+              <a:defRPr sz="1000">
+                <a:solidFill>
+                  <a:srgbClr val="707080"/>
+                </a:solidFill>
+              </a:defRPr>
+            </a:pPr>
+            <a:r>
+              <a:t>Style: Soft Slate Tint</a:t>
             </a:r>
           </a:p>
           <a:p>
@@ -4243,59 +5660,14 @@
               <a:spcBef>
                 <a:spcPts val="1200"/>
               </a:spcBef>
-              <a:defRPr sz="1400">
+              <a:defRPr sz="1100">
                 <a:solidFill>
                   <a:srgbClr val="16162A"/>
                 </a:solidFill>
               </a:defRPr>
             </a:pPr>
             <a:r>
-              <a:t>• Standardized Shift Timings: Morning (7:00 AM - 3:00 PM), Evening (3:00 PM - 11:00 PM), Night (11:00 PM - 7:00 AM).</a:t>
-            </a:r>
-          </a:p>
-          <a:p>
-            <a:pPr>
-              <a:spcBef>
-                <a:spcPts val="1200"/>
-              </a:spcBef>
-              <a:defRPr sz="1400">
-                <a:solidFill>
-                  <a:srgbClr val="16162A"/>
-                </a:solidFill>
-              </a:defRPr>
-            </a:pPr>
-            <a:r>
-              <a:t>• Color-Coded Background Tints: Soft emerald (Morning), amber (Evening), purple (Night), and slate (Off Duty).</a:t>
-            </a:r>
-          </a:p>
-          <a:p>
-            <a:pPr>
-              <a:spcBef>
-                <a:spcPts val="1200"/>
-              </a:spcBef>
-              <a:defRPr sz="1400">
-                <a:solidFill>
-                  <a:srgbClr val="16162A"/>
-                </a:solidFill>
-              </a:defRPr>
-            </a:pPr>
-            <a:r>
-              <a:t>• Dedicated Full-Width Action Buttons: Glassmorphic 'View Details →' action buttons on every day card.</a:t>
-            </a:r>
-          </a:p>
-          <a:p>
-            <a:pPr>
-              <a:spcBef>
-                <a:spcPts val="1200"/>
-              </a:spcBef>
-              <a:defRPr sz="1400">
-                <a:solidFill>
-                  <a:srgbClr val="16162A"/>
-                </a:solidFill>
-              </a:defRPr>
-            </a:pPr>
-            <a:r>
-              <a:t>• Interactive Shift Handover Notes: Ward notes, active status indicators, and modal previews.</a:t>
+              <a:t>Rest &amp; Scheduled Downtime between shifts</a:t>
             </a:r>
           </a:p>
         </p:txBody>
@@ -4320,91 +5692,24 @@
       <p:grpSpPr/>
       <p:sp>
         <p:nvSpPr>
-          <p:cNvPr id="2" name="TextBox 1"/>
-          <p:cNvSpPr txBox="1"/>
-          <p:nvPr/>
-        </p:nvSpPr>
-        <p:spPr>
-          <a:xfrm>
-            <a:off x="731520" y="365760"/>
-            <a:ext cx="7315200" cy="365760"/>
-          </a:xfrm>
-          <a:prstGeom prst="rect">
-            <a:avLst/>
-          </a:prstGeom>
-          <a:noFill/>
-        </p:spPr>
-        <p:txBody>
-          <a:bodyPr wrap="none">
-            <a:spAutoFit/>
-          </a:bodyPr>
-          <a:lstStyle/>
-          <a:p>
-            <a:pPr>
-              <a:defRPr sz="1100" b="1">
-                <a:solidFill>
-                  <a:srgbClr val="5142C5"/>
-                </a:solidFill>
-              </a:defRPr>
-            </a:pPr>
-            <a:r>
-              <a:t>NURSEFLOW PLATFORM PRESENTATION</a:t>
-            </a:r>
-          </a:p>
-        </p:txBody>
-      </p:sp>
-      <p:sp>
-        <p:nvSpPr>
-          <p:cNvPr id="3" name="TextBox 2"/>
-          <p:cNvSpPr txBox="1"/>
-          <p:nvPr/>
-        </p:nvSpPr>
-        <p:spPr>
-          <a:xfrm>
-            <a:off x="731520" y="640080"/>
-            <a:ext cx="10058400" cy="731520"/>
-          </a:xfrm>
-          <a:prstGeom prst="rect">
-            <a:avLst/>
-          </a:prstGeom>
-          <a:noFill/>
-        </p:spPr>
-        <p:txBody>
-          <a:bodyPr wrap="none">
-            <a:spAutoFit/>
-          </a:bodyPr>
-          <a:lstStyle/>
-          <a:p>
-            <a:pPr>
-              <a:defRPr sz="2600" b="1">
-                <a:solidFill>
-                  <a:srgbClr val="16162A"/>
-                </a:solidFill>
-              </a:defRPr>
-            </a:pPr>
-            <a:r>
-              <a:t>Feature 2: Gemma 4 AI Patient Communication Simulator</a:t>
-            </a:r>
-          </a:p>
-        </p:txBody>
-      </p:sp>
-      <p:sp>
-        <p:nvSpPr>
-          <p:cNvPr id="4" name="Rounded Rectangle 3"/>
+          <p:cNvPr id="2" name="Rectangle 1"/>
           <p:cNvSpPr/>
           <p:nvPr/>
         </p:nvSpPr>
         <p:spPr>
           <a:xfrm>
-            <a:off x="731520" y="1645920"/>
-            <a:ext cx="5120640" cy="4389120"/>
-          </a:xfrm>
-          <a:prstGeom prst="roundRect">
+            <a:off x="731520" y="365760"/>
+            <a:ext cx="10728655" cy="36576"/>
+          </a:xfrm>
+          <a:prstGeom prst="rect">
             <a:avLst/>
           </a:prstGeom>
           <a:solidFill>
-            <a:srgbClr val="16162A"/>
+            <a:srgbClr val="5142C5"/>
           </a:solidFill>
+          <a:ln>
+            <a:noFill/>
+          </a:ln>
         </p:spPr>
         <p:style>
           <a:lnRef idx="1">
@@ -4421,18 +5726,163 @@
           </a:fontRef>
         </p:style>
         <p:txBody>
-          <a:bodyPr rtlCol="0" anchor="ctr" wrap="square"/>
+          <a:bodyPr rtlCol="0" anchor="ctr"/>
+          <a:lstStyle/>
+          <a:p>
+            <a:pPr algn="ctr"/>
+          </a:p>
+        </p:txBody>
+      </p:sp>
+      <p:sp>
+        <p:nvSpPr>
+          <p:cNvPr id="3" name="TextBox 2"/>
+          <p:cNvSpPr txBox="1"/>
+          <p:nvPr/>
+        </p:nvSpPr>
+        <p:spPr>
+          <a:xfrm>
+            <a:off x="731520" y="457200"/>
+            <a:ext cx="7315200" cy="320040"/>
+          </a:xfrm>
+          <a:prstGeom prst="rect">
+            <a:avLst/>
+          </a:prstGeom>
+          <a:noFill/>
+        </p:spPr>
+        <p:txBody>
+          <a:bodyPr wrap="square">
+            <a:spAutoFit/>
+          </a:bodyPr>
+          <a:lstStyle/>
+          <a:p>
+            <a:pPr>
+              <a:defRPr sz="1000" b="1">
+                <a:solidFill>
+                  <a:srgbClr val="5142C5"/>
+                </a:solidFill>
+              </a:defRPr>
+            </a:pPr>
+            <a:r>
+              <a:t>NURSEFLOW ENTERPRISE PLATFORM</a:t>
+            </a:r>
+          </a:p>
+        </p:txBody>
+      </p:sp>
+      <p:sp>
+        <p:nvSpPr>
+          <p:cNvPr id="4" name="TextBox 3"/>
+          <p:cNvSpPr txBox="1"/>
+          <p:nvPr/>
+        </p:nvSpPr>
+        <p:spPr>
+          <a:xfrm>
+            <a:off x="731520" y="731520"/>
+            <a:ext cx="10728655" cy="640080"/>
+          </a:xfrm>
+          <a:prstGeom prst="rect">
+            <a:avLst/>
+          </a:prstGeom>
+          <a:noFill/>
+        </p:spPr>
+        <p:txBody>
+          <a:bodyPr wrap="square">
+            <a:spAutoFit/>
+          </a:bodyPr>
+          <a:lstStyle/>
+          <a:p>
+            <a:pPr>
+              <a:defRPr sz="2400" b="1">
+                <a:solidFill>
+                  <a:srgbClr val="16162A"/>
+                </a:solidFill>
+              </a:defRPr>
+            </a:pPr>
+            <a:r>
+              <a:t>Core Module 2: Gemma 4 AI Patient Communication Simulator</a:t>
+            </a:r>
+          </a:p>
+        </p:txBody>
+      </p:sp>
+      <p:sp>
+        <p:nvSpPr>
+          <p:cNvPr id="5" name="TextBox 4"/>
+          <p:cNvSpPr txBox="1"/>
+          <p:nvPr/>
+        </p:nvSpPr>
+        <p:spPr>
+          <a:xfrm>
+            <a:off x="731520" y="6400800"/>
+            <a:ext cx="10728655" cy="365760"/>
+          </a:xfrm>
+          <a:prstGeom prst="rect">
+            <a:avLst/>
+          </a:prstGeom>
+          <a:noFill/>
+        </p:spPr>
+        <p:txBody>
+          <a:bodyPr wrap="square">
+            <a:spAutoFit/>
+          </a:bodyPr>
+          <a:lstStyle/>
+          <a:p>
+            <a:pPr>
+              <a:defRPr sz="900">
+                <a:solidFill>
+                  <a:srgbClr val="707080"/>
+                </a:solidFill>
+              </a:defRPr>
+            </a:pPr>
+            <a:r>
+              <a:t>NurseFlow Platform Presentation  |  Slide 5 of 12  |  Arbisoft-GDG Hackathon 2026</a:t>
+            </a:r>
+          </a:p>
+        </p:txBody>
+      </p:sp>
+      <p:sp>
+        <p:nvSpPr>
+          <p:cNvPr id="6" name="Rounded Rectangle 5"/>
+          <p:cNvSpPr/>
+          <p:nvPr/>
+        </p:nvSpPr>
+        <p:spPr>
+          <a:xfrm>
+            <a:off x="731520" y="1463040"/>
+            <a:ext cx="5120640" cy="4572000"/>
+          </a:xfrm>
+          <a:prstGeom prst="roundRect">
+            <a:avLst/>
+          </a:prstGeom>
+          <a:solidFill>
+            <a:srgbClr val="16162A"/>
+          </a:solidFill>
+        </p:spPr>
+        <p:style>
+          <a:lnRef idx="1">
+            <a:schemeClr val="accent1"/>
+          </a:lnRef>
+          <a:fillRef idx="3">
+            <a:schemeClr val="accent1"/>
+          </a:fillRef>
+          <a:effectRef idx="2">
+            <a:schemeClr val="accent1"/>
+          </a:effectRef>
+          <a:fontRef idx="minor">
+            <a:schemeClr val="lt1"/>
+          </a:fontRef>
+        </p:style>
+        <p:txBody>
+          <a:bodyPr rtlCol="0" anchor="ctr" wrap="square" lIns="274320" tIns="274320"/>
           <a:lstStyle/>
           <a:p>
             <a:pPr algn="ctr">
-              <a:defRPr sz="2000" b="1">
-                <a:solidFill>
-                  <a:srgbClr val="FACC15"/>
-                </a:solidFill>
-              </a:defRPr>
-            </a:pPr>
-            <a:r>
-              <a:t>🤖 AI Persona Roleplay</a:t>
+              <a:defRPr sz="1800" b="1">
+                <a:solidFill>
+                  <a:srgbClr val="F59E0B"/>
+                </a:solidFill>
+              </a:defRPr>
+            </a:pPr>
+            <a:r>
+              <a:t>🤖 AI Persona Roleplay Engine</a:t>
             </a:r>
           </a:p>
           <a:p>
@@ -4440,14 +5890,14 @@
               <a:spcBef>
                 <a:spcPts val="1000"/>
               </a:spcBef>
-              <a:defRPr sz="1300">
+              <a:defRPr sz="1200">
                 <a:solidFill>
                   <a:srgbClr val="FFFFFF"/>
                 </a:solidFill>
               </a:defRPr>
             </a:pPr>
             <a:r>
-              <a:t>• Simulated Scenarios: Anxious Patient, Angry Family Member, Confused Elderly Patient, Emergency Intake.</a:t>
+              <a:t>• Pre-Seeded Scenarios: Anxious Patient, Angry Family Member, Confused Elderly Patient, Non-Cooperative Patient.</a:t>
             </a:r>
           </a:p>
           <a:p>
@@ -4455,14 +5905,14 @@
               <a:spcBef>
                 <a:spcPts val="1000"/>
               </a:spcBef>
-              <a:defRPr sz="1300">
+              <a:defRPr sz="1200">
                 <a:solidFill>
                   <a:srgbClr val="FFFFFF"/>
                 </a:solidFill>
               </a:defRPr>
             </a:pPr>
             <a:r>
-              <a:t>• Dynamic Character Emotions: Real-time emotion shifts (Hostile → Frustrated → Worried → Calm → Reassured).</a:t>
+              <a:t>• Dynamic Character Emotion Shift: Evaluates nurse empathy signals ('understand', 'listen', 'help') to shift tone.</a:t>
             </a:r>
           </a:p>
           <a:p>
@@ -4470,28 +5920,43 @@
               <a:spcBef>
                 <a:spcPts val="1000"/>
               </a:spcBef>
-              <a:defRPr sz="1300">
+              <a:defRPr sz="1200">
                 <a:solidFill>
                   <a:srgbClr val="FFFFFF"/>
                 </a:solidFill>
               </a:defRPr>
             </a:pPr>
             <a:r>
-              <a:t>• Difficulty Levels: Beginner, Intermediate, Advanced persona complexity.</a:t>
-            </a:r>
-          </a:p>
-        </p:txBody>
-      </p:sp>
-      <p:sp>
-        <p:nvSpPr>
-          <p:cNvPr id="5" name="Rounded Rectangle 4"/>
+              <a:t>• Emotion Shift Pipeline: Hostile ➔ Frustrated ➔ Worried ➔ Calm ➔ Reassured.</a:t>
+            </a:r>
+          </a:p>
+          <a:p>
+            <a:pPr>
+              <a:spcBef>
+                <a:spcPts val="1000"/>
+              </a:spcBef>
+              <a:defRPr sz="1200">
+                <a:solidFill>
+                  <a:srgbClr val="FFFFFF"/>
+                </a:solidFill>
+              </a:defRPr>
+            </a:pPr>
+            <a:r>
+              <a:t>• Educational Tooling: Safe roleplay environment to practice high-stress conversations.</a:t>
+            </a:r>
+          </a:p>
+        </p:txBody>
+      </p:sp>
+      <p:sp>
+        <p:nvSpPr>
+          <p:cNvPr id="7" name="Rounded Rectangle 6"/>
           <p:cNvSpPr/>
           <p:nvPr/>
         </p:nvSpPr>
         <p:spPr>
           <a:xfrm>
-            <a:off x="6217920" y="1645920"/>
-            <a:ext cx="5120640" cy="4389120"/>
+            <a:off x="6217920" y="1463040"/>
+            <a:ext cx="5120640" cy="4572000"/>
           </a:xfrm>
           <a:prstGeom prst="roundRect">
             <a:avLst/>
@@ -4520,18 +5985,18 @@
           </a:fontRef>
         </p:style>
         <p:txBody>
-          <a:bodyPr rtlCol="0" anchor="ctr" wrap="square"/>
+          <a:bodyPr rtlCol="0" anchor="ctr" wrap="square" lIns="274320" tIns="274320"/>
           <a:lstStyle/>
           <a:p>
             <a:pPr algn="ctr">
-              <a:defRPr sz="2000" b="1">
+              <a:defRPr sz="1800" b="1">
                 <a:solidFill>
                   <a:srgbClr val="16162A"/>
                 </a:solidFill>
               </a:defRPr>
             </a:pPr>
             <a:r>
-              <a:t>📊 8-Competency Performance Evaluation</a:t>
+              <a:t>📊 8-Competency Evaluation Engine</a:t>
             </a:r>
           </a:p>
           <a:p>
@@ -4539,14 +6004,14 @@
               <a:spcBef>
                 <a:spcPts val="600"/>
               </a:spcBef>
-              <a:defRPr sz="1200">
+              <a:defRPr sz="1100">
                 <a:solidFill>
                   <a:srgbClr val="16162A"/>
                 </a:solidFill>
               </a:defRPr>
             </a:pPr>
             <a:r>
-              <a:t>✓ 1. Empathy &amp; Compassion (0-100)</a:t>
+              <a:t>✓ 1. Empathy &amp; Compassion Score (0-100)</a:t>
             </a:r>
           </a:p>
           <a:p>
@@ -4554,7 +6019,7 @@
               <a:spcBef>
                 <a:spcPts val="600"/>
               </a:spcBef>
-              <a:defRPr sz="1200">
+              <a:defRPr sz="1100">
                 <a:solidFill>
                   <a:srgbClr val="16162A"/>
                 </a:solidFill>
@@ -4569,14 +6034,14 @@
               <a:spcBef>
                 <a:spcPts val="600"/>
               </a:spcBef>
-              <a:defRPr sz="1200">
+              <a:defRPr sz="1100">
                 <a:solidFill>
                   <a:srgbClr val="16162A"/>
                 </a:solidFill>
               </a:defRPr>
             </a:pPr>
             <a:r>
-              <a:t>✓ 3. Communication Clarity &amp; Medical Terms</a:t>
+              <a:t>✓ 3. Communication Clarity &amp; Terminology</a:t>
             </a:r>
           </a:p>
           <a:p>
@@ -4584,7 +6049,7 @@
               <a:spcBef>
                 <a:spcPts val="600"/>
               </a:spcBef>
-              <a:defRPr sz="1200">
+              <a:defRPr sz="1100">
                 <a:solidFill>
                   <a:srgbClr val="16162A"/>
                 </a:solidFill>
@@ -4599,7 +6064,7 @@
               <a:spcBef>
                 <a:spcPts val="600"/>
               </a:spcBef>
-              <a:defRPr sz="1200">
+              <a:defRPr sz="1100">
                 <a:solidFill>
                   <a:srgbClr val="16162A"/>
                 </a:solidFill>
@@ -4614,7 +6079,7 @@
               <a:spcBef>
                 <a:spcPts val="600"/>
               </a:spcBef>
-              <a:defRPr sz="1200">
+              <a:defRPr sz="1100">
                 <a:solidFill>
                   <a:srgbClr val="16162A"/>
                 </a:solidFill>
@@ -4629,14 +6094,14 @@
               <a:spcBef>
                 <a:spcPts val="600"/>
               </a:spcBef>
-              <a:defRPr sz="1200">
+              <a:defRPr sz="1100">
                 <a:solidFill>
                   <a:srgbClr val="16162A"/>
                 </a:solidFill>
               </a:defRPr>
             </a:pPr>
             <a:r>
-              <a:t>✓ 7. Confidence &amp; Clinical Decision Support</a:t>
+              <a:t>✓ 7. Confidence &amp; Clinical Support</a:t>
             </a:r>
           </a:p>
           <a:p>
@@ -4644,7 +6109,7 @@
               <a:spcBef>
                 <a:spcPts val="600"/>
               </a:spcBef>
-              <a:defRPr sz="1200">
+              <a:defRPr sz="1100">
                 <a:solidFill>
                   <a:srgbClr val="16162A"/>
                 </a:solidFill>
@@ -4676,36 +6141,44 @@
       <p:grpSpPr/>
       <p:sp>
         <p:nvSpPr>
-          <p:cNvPr id="2" name="TextBox 1"/>
-          <p:cNvSpPr txBox="1"/>
+          <p:cNvPr id="2" name="Rectangle 1"/>
+          <p:cNvSpPr/>
           <p:nvPr/>
         </p:nvSpPr>
         <p:spPr>
           <a:xfrm>
             <a:off x="731520" y="365760"/>
-            <a:ext cx="7315200" cy="365760"/>
+            <a:ext cx="10728655" cy="36576"/>
           </a:xfrm>
           <a:prstGeom prst="rect">
             <a:avLst/>
           </a:prstGeom>
-          <a:noFill/>
-        </p:spPr>
-        <p:txBody>
-          <a:bodyPr wrap="none">
-            <a:spAutoFit/>
-          </a:bodyPr>
-          <a:lstStyle/>
-          <a:p>
-            <a:pPr>
-              <a:defRPr sz="1100" b="1">
-                <a:solidFill>
-                  <a:srgbClr val="5142C5"/>
-                </a:solidFill>
-              </a:defRPr>
-            </a:pPr>
-            <a:r>
-              <a:t>NURSEFLOW PLATFORM PRESENTATION</a:t>
-            </a:r>
+          <a:solidFill>
+            <a:srgbClr val="5142C5"/>
+          </a:solidFill>
+          <a:ln>
+            <a:noFill/>
+          </a:ln>
+        </p:spPr>
+        <p:style>
+          <a:lnRef idx="1">
+            <a:schemeClr val="accent1"/>
+          </a:lnRef>
+          <a:fillRef idx="3">
+            <a:schemeClr val="accent1"/>
+          </a:fillRef>
+          <a:effectRef idx="2">
+            <a:schemeClr val="accent1"/>
+          </a:effectRef>
+          <a:fontRef idx="minor">
+            <a:schemeClr val="lt1"/>
+          </a:fontRef>
+        </p:style>
+        <p:txBody>
+          <a:bodyPr rtlCol="0" anchor="ctr"/>
+          <a:lstStyle/>
+          <a:p>
+            <a:pPr algn="ctr"/>
           </a:p>
         </p:txBody>
       </p:sp>
@@ -4717,8 +6190,8 @@
         </p:nvSpPr>
         <p:spPr>
           <a:xfrm>
-            <a:off x="731520" y="640080"/>
-            <a:ext cx="10058400" cy="731520"/>
+            <a:off x="731520" y="457200"/>
+            <a:ext cx="7315200" cy="320040"/>
           </a:xfrm>
           <a:prstGeom prst="rect">
             <a:avLst/>
@@ -4726,34 +6199,173 @@
           <a:noFill/>
         </p:spPr>
         <p:txBody>
-          <a:bodyPr wrap="none">
+          <a:bodyPr wrap="square">
             <a:spAutoFit/>
           </a:bodyPr>
           <a:lstStyle/>
           <a:p>
             <a:pPr>
-              <a:defRPr sz="2600" b="1">
+              <a:defRPr sz="1000" b="1">
+                <a:solidFill>
+                  <a:srgbClr val="5142C5"/>
+                </a:solidFill>
+              </a:defRPr>
+            </a:pPr>
+            <a:r>
+              <a:t>NURSEFLOW ENTERPRISE PLATFORM</a:t>
+            </a:r>
+          </a:p>
+        </p:txBody>
+      </p:sp>
+      <p:sp>
+        <p:nvSpPr>
+          <p:cNvPr id="4" name="TextBox 3"/>
+          <p:cNvSpPr txBox="1"/>
+          <p:nvPr/>
+        </p:nvSpPr>
+        <p:spPr>
+          <a:xfrm>
+            <a:off x="731520" y="731520"/>
+            <a:ext cx="10728655" cy="640080"/>
+          </a:xfrm>
+          <a:prstGeom prst="rect">
+            <a:avLst/>
+          </a:prstGeom>
+          <a:noFill/>
+        </p:spPr>
+        <p:txBody>
+          <a:bodyPr wrap="square">
+            <a:spAutoFit/>
+          </a:bodyPr>
+          <a:lstStyle/>
+          <a:p>
+            <a:pPr>
+              <a:defRPr sz="2400" b="1">
                 <a:solidFill>
                   <a:srgbClr val="16162A"/>
                 </a:solidFill>
               </a:defRPr>
             </a:pPr>
             <a:r>
-              <a:t>Feature 3: AI Tick &amp; Cross (Tic-Tac-Toe ❌⭕) Break Game</a:t>
-            </a:r>
-          </a:p>
-        </p:txBody>
-      </p:sp>
-      <p:sp>
-        <p:nvSpPr>
-          <p:cNvPr id="4" name="Rounded Rectangle 3"/>
+              <a:t>8-Competency AI Clinical Evaluation Metrics</a:t>
+            </a:r>
+          </a:p>
+        </p:txBody>
+      </p:sp>
+      <p:sp>
+        <p:nvSpPr>
+          <p:cNvPr id="5" name="TextBox 4"/>
+          <p:cNvSpPr txBox="1"/>
+          <p:nvPr/>
+        </p:nvSpPr>
+        <p:spPr>
+          <a:xfrm>
+            <a:off x="731520" y="6400800"/>
+            <a:ext cx="10728655" cy="365760"/>
+          </a:xfrm>
+          <a:prstGeom prst="rect">
+            <a:avLst/>
+          </a:prstGeom>
+          <a:noFill/>
+        </p:spPr>
+        <p:txBody>
+          <a:bodyPr wrap="square">
+            <a:spAutoFit/>
+          </a:bodyPr>
+          <a:lstStyle/>
+          <a:p>
+            <a:pPr>
+              <a:defRPr sz="900">
+                <a:solidFill>
+                  <a:srgbClr val="707080"/>
+                </a:solidFill>
+              </a:defRPr>
+            </a:pPr>
+            <a:r>
+              <a:t>NurseFlow Platform Presentation  |  Slide 6 of 12  |  Arbisoft-GDG Hackathon 2026</a:t>
+            </a:r>
+          </a:p>
+        </p:txBody>
+      </p:sp>
+      <p:sp>
+        <p:nvSpPr>
+          <p:cNvPr id="6" name="Rounded Rectangle 5"/>
           <p:cNvSpPr/>
           <p:nvPr/>
         </p:nvSpPr>
         <p:spPr>
           <a:xfrm>
-            <a:off x="731520" y="1645920"/>
-            <a:ext cx="10607040" cy="4389120"/>
+            <a:off x="731520" y="1463040"/>
+            <a:ext cx="5120640" cy="1005840"/>
+          </a:xfrm>
+          <a:prstGeom prst="roundRect">
+            <a:avLst/>
+          </a:prstGeom>
+          <a:solidFill>
+            <a:srgbClr val="FFFFFF"/>
+          </a:solidFill>
+          <a:ln w="25400">
+            <a:solidFill>
+              <a:srgbClr val="059669"/>
+            </a:solidFill>
+          </a:ln>
+        </p:spPr>
+        <p:style>
+          <a:lnRef idx="1">
+            <a:schemeClr val="accent1"/>
+          </a:lnRef>
+          <a:fillRef idx="3">
+            <a:schemeClr val="accent1"/>
+          </a:fillRef>
+          <a:effectRef idx="2">
+            <a:schemeClr val="accent1"/>
+          </a:effectRef>
+          <a:fontRef idx="minor">
+            <a:schemeClr val="lt1"/>
+          </a:fontRef>
+        </p:style>
+        <p:txBody>
+          <a:bodyPr rtlCol="0" anchor="ctr" wrap="square" lIns="182880" tIns="109728"/>
+          <a:lstStyle/>
+          <a:p>
+            <a:pPr algn="ctr">
+              <a:defRPr sz="1400" b="1">
+                <a:solidFill>
+                  <a:srgbClr val="059669"/>
+                </a:solidFill>
+              </a:defRPr>
+            </a:pPr>
+            <a:r>
+              <a:t>1. Empathy &amp; Compassion</a:t>
+            </a:r>
+          </a:p>
+          <a:p>
+            <a:pPr>
+              <a:spcBef>
+                <a:spcPts val="400"/>
+              </a:spcBef>
+              <a:defRPr sz="1000">
+                <a:solidFill>
+                  <a:srgbClr val="707080"/>
+                </a:solidFill>
+              </a:defRPr>
+            </a:pPr>
+            <a:r>
+              <a:t>Validating patient feelings &amp; active care</a:t>
+            </a:r>
+          </a:p>
+        </p:txBody>
+      </p:sp>
+      <p:sp>
+        <p:nvSpPr>
+          <p:cNvPr id="7" name="Rounded Rectangle 6"/>
+          <p:cNvSpPr/>
+          <p:nvPr/>
+        </p:nvSpPr>
+        <p:spPr>
+          <a:xfrm>
+            <a:off x="731520" y="2606040"/>
+            <a:ext cx="5120640" cy="1005840"/>
           </a:xfrm>
           <a:prstGeom prst="roundRect">
             <a:avLst/>
@@ -4782,93 +6394,447 @@
           </a:fontRef>
         </p:style>
         <p:txBody>
-          <a:bodyPr rtlCol="0" anchor="ctr" wrap="square"/>
+          <a:bodyPr rtlCol="0" anchor="ctr" wrap="square" lIns="182880" tIns="109728"/>
           <a:lstStyle/>
           <a:p>
             <a:pPr algn="ctr">
-              <a:defRPr sz="2200" b="1">
+              <a:defRPr sz="1400" b="1">
                 <a:solidFill>
                   <a:srgbClr val="5142C5"/>
                 </a:solidFill>
               </a:defRPr>
             </a:pPr>
             <a:r>
-              <a:t>🎮 Nurse Shift Break Relaxation Lounge</a:t>
+              <a:t>2. Active Listening</a:t>
             </a:r>
           </a:p>
           <a:p>
             <a:pPr>
               <a:spcBef>
-                <a:spcPts val="1200"/>
+                <a:spcPts val="400"/>
               </a:spcBef>
-              <a:defRPr sz="1400">
+              <a:defRPr sz="1000">
+                <a:solidFill>
+                  <a:srgbClr val="707080"/>
+                </a:solidFill>
+              </a:defRPr>
+            </a:pPr>
+            <a:r>
+              <a:t>Addressing patient questions without skipping details</a:t>
+            </a:r>
+          </a:p>
+        </p:txBody>
+      </p:sp>
+      <p:sp>
+        <p:nvSpPr>
+          <p:cNvPr id="8" name="Rounded Rectangle 7"/>
+          <p:cNvSpPr/>
+          <p:nvPr/>
+        </p:nvSpPr>
+        <p:spPr>
+          <a:xfrm>
+            <a:off x="731520" y="3749039"/>
+            <a:ext cx="5120640" cy="1005840"/>
+          </a:xfrm>
+          <a:prstGeom prst="roundRect">
+            <a:avLst/>
+          </a:prstGeom>
+          <a:solidFill>
+            <a:srgbClr val="FFFFFF"/>
+          </a:solidFill>
+          <a:ln w="25400">
+            <a:solidFill>
+              <a:srgbClr val="F59E0B"/>
+            </a:solidFill>
+          </a:ln>
+        </p:spPr>
+        <p:style>
+          <a:lnRef idx="1">
+            <a:schemeClr val="accent1"/>
+          </a:lnRef>
+          <a:fillRef idx="3">
+            <a:schemeClr val="accent1"/>
+          </a:fillRef>
+          <a:effectRef idx="2">
+            <a:schemeClr val="accent1"/>
+          </a:effectRef>
+          <a:fontRef idx="minor">
+            <a:schemeClr val="lt1"/>
+          </a:fontRef>
+        </p:style>
+        <p:txBody>
+          <a:bodyPr rtlCol="0" anchor="ctr" wrap="square" lIns="182880" tIns="109728"/>
+          <a:lstStyle/>
+          <a:p>
+            <a:pPr algn="ctr">
+              <a:defRPr sz="1400" b="1">
+                <a:solidFill>
+                  <a:srgbClr val="F59E0B"/>
+                </a:solidFill>
+              </a:defRPr>
+            </a:pPr>
+            <a:r>
+              <a:t>3. Communication Clarity</a:t>
+            </a:r>
+          </a:p>
+          <a:p>
+            <a:pPr>
+              <a:spcBef>
+                <a:spcPts val="400"/>
+              </a:spcBef>
+              <a:defRPr sz="1000">
+                <a:solidFill>
+                  <a:srgbClr val="707080"/>
+                </a:solidFill>
+              </a:defRPr>
+            </a:pPr>
+            <a:r>
+              <a:t>Explaining medical terms in simple language</a:t>
+            </a:r>
+          </a:p>
+        </p:txBody>
+      </p:sp>
+      <p:sp>
+        <p:nvSpPr>
+          <p:cNvPr id="9" name="Rounded Rectangle 8"/>
+          <p:cNvSpPr/>
+          <p:nvPr/>
+        </p:nvSpPr>
+        <p:spPr>
+          <a:xfrm>
+            <a:off x="731520" y="4892040"/>
+            <a:ext cx="5120640" cy="1005840"/>
+          </a:xfrm>
+          <a:prstGeom prst="roundRect">
+            <a:avLst/>
+          </a:prstGeom>
+          <a:solidFill>
+            <a:srgbClr val="FFFFFF"/>
+          </a:solidFill>
+          <a:ln w="25400">
+            <a:solidFill>
+              <a:srgbClr val="16162A"/>
+            </a:solidFill>
+          </a:ln>
+        </p:spPr>
+        <p:style>
+          <a:lnRef idx="1">
+            <a:schemeClr val="accent1"/>
+          </a:lnRef>
+          <a:fillRef idx="3">
+            <a:schemeClr val="accent1"/>
+          </a:fillRef>
+          <a:effectRef idx="2">
+            <a:schemeClr val="accent1"/>
+          </a:effectRef>
+          <a:fontRef idx="minor">
+            <a:schemeClr val="lt1"/>
+          </a:fontRef>
+        </p:style>
+        <p:txBody>
+          <a:bodyPr rtlCol="0" anchor="ctr" wrap="square" lIns="182880" tIns="109728"/>
+          <a:lstStyle/>
+          <a:p>
+            <a:pPr algn="ctr">
+              <a:defRPr sz="1400" b="1">
                 <a:solidFill>
                   <a:srgbClr val="16162A"/>
                 </a:solidFill>
               </a:defRPr>
             </a:pPr>
             <a:r>
-              <a:t>• 100% Non-Medical Relaxation: Pure fun mini-game designed for 10-minute shift breaks to help nurses feel refreshed.</a:t>
+              <a:t>4. Professionalism</a:t>
             </a:r>
           </a:p>
           <a:p>
             <a:pPr>
               <a:spcBef>
-                <a:spcPts val="1200"/>
+                <a:spcPts val="400"/>
               </a:spcBef>
-              <a:defRPr sz="1400">
+              <a:defRPr sz="1000">
+                <a:solidFill>
+                  <a:srgbClr val="707080"/>
+                </a:solidFill>
+              </a:defRPr>
+            </a:pPr>
+            <a:r>
+              <a:t>Maintaining calm composure under pressure</a:t>
+            </a:r>
+          </a:p>
+        </p:txBody>
+      </p:sp>
+      <p:sp>
+        <p:nvSpPr>
+          <p:cNvPr id="10" name="Rounded Rectangle 9"/>
+          <p:cNvSpPr/>
+          <p:nvPr/>
+        </p:nvSpPr>
+        <p:spPr>
+          <a:xfrm>
+            <a:off x="6217920" y="1463040"/>
+            <a:ext cx="5120640" cy="1005840"/>
+          </a:xfrm>
+          <a:prstGeom prst="roundRect">
+            <a:avLst/>
+          </a:prstGeom>
+          <a:solidFill>
+            <a:srgbClr val="FFFFFF"/>
+          </a:solidFill>
+          <a:ln w="25400">
+            <a:solidFill>
+              <a:srgbClr val="059669"/>
+            </a:solidFill>
+          </a:ln>
+        </p:spPr>
+        <p:style>
+          <a:lnRef idx="1">
+            <a:schemeClr val="accent1"/>
+          </a:lnRef>
+          <a:fillRef idx="3">
+            <a:schemeClr val="accent1"/>
+          </a:fillRef>
+          <a:effectRef idx="2">
+            <a:schemeClr val="accent1"/>
+          </a:effectRef>
+          <a:fontRef idx="minor">
+            <a:schemeClr val="lt1"/>
+          </a:fontRef>
+        </p:style>
+        <p:txBody>
+          <a:bodyPr rtlCol="0" anchor="ctr" wrap="square" lIns="182880" tIns="109728"/>
+          <a:lstStyle/>
+          <a:p>
+            <a:pPr algn="ctr">
+              <a:defRPr sz="1400" b="1">
+                <a:solidFill>
+                  <a:srgbClr val="059669"/>
+                </a:solidFill>
+              </a:defRPr>
+            </a:pPr>
+            <a:r>
+              <a:t>5. De-escalation Capability</a:t>
+            </a:r>
+          </a:p>
+          <a:p>
+            <a:pPr>
+              <a:spcBef>
+                <a:spcPts val="400"/>
+              </a:spcBef>
+              <a:defRPr sz="1000">
+                <a:solidFill>
+                  <a:srgbClr val="707080"/>
+                </a:solidFill>
+              </a:defRPr>
+            </a:pPr>
+            <a:r>
+              <a:t>Neutralizing angry or confused situations</a:t>
+            </a:r>
+          </a:p>
+        </p:txBody>
+      </p:sp>
+      <p:sp>
+        <p:nvSpPr>
+          <p:cNvPr id="11" name="Rounded Rectangle 10"/>
+          <p:cNvSpPr/>
+          <p:nvPr/>
+        </p:nvSpPr>
+        <p:spPr>
+          <a:xfrm>
+            <a:off x="6217920" y="2606040"/>
+            <a:ext cx="5120640" cy="1005840"/>
+          </a:xfrm>
+          <a:prstGeom prst="roundRect">
+            <a:avLst/>
+          </a:prstGeom>
+          <a:solidFill>
+            <a:srgbClr val="FFFFFF"/>
+          </a:solidFill>
+          <a:ln w="25400">
+            <a:solidFill>
+              <a:srgbClr val="5142C5"/>
+            </a:solidFill>
+          </a:ln>
+        </p:spPr>
+        <p:style>
+          <a:lnRef idx="1">
+            <a:schemeClr val="accent1"/>
+          </a:lnRef>
+          <a:fillRef idx="3">
+            <a:schemeClr val="accent1"/>
+          </a:fillRef>
+          <a:effectRef idx="2">
+            <a:schemeClr val="accent1"/>
+          </a:effectRef>
+          <a:fontRef idx="minor">
+            <a:schemeClr val="lt1"/>
+          </a:fontRef>
+        </p:style>
+        <p:txBody>
+          <a:bodyPr rtlCol="0" anchor="ctr" wrap="square" lIns="182880" tIns="109728"/>
+          <a:lstStyle/>
+          <a:p>
+            <a:pPr algn="ctr">
+              <a:defRPr sz="1400" b="1">
+                <a:solidFill>
+                  <a:srgbClr val="5142C5"/>
+                </a:solidFill>
+              </a:defRPr>
+            </a:pPr>
+            <a:r>
+              <a:t>6. Patient Engagement</a:t>
+            </a:r>
+          </a:p>
+          <a:p>
+            <a:pPr>
+              <a:spcBef>
+                <a:spcPts val="400"/>
+              </a:spcBef>
+              <a:defRPr sz="1000">
+                <a:solidFill>
+                  <a:srgbClr val="707080"/>
+                </a:solidFill>
+              </a:defRPr>
+            </a:pPr>
+            <a:r>
+              <a:t>Involving patient in care decision-making</a:t>
+            </a:r>
+          </a:p>
+        </p:txBody>
+      </p:sp>
+      <p:sp>
+        <p:nvSpPr>
+          <p:cNvPr id="12" name="Rounded Rectangle 11"/>
+          <p:cNvSpPr/>
+          <p:nvPr/>
+        </p:nvSpPr>
+        <p:spPr>
+          <a:xfrm>
+            <a:off x="6217920" y="3749039"/>
+            <a:ext cx="5120640" cy="1005840"/>
+          </a:xfrm>
+          <a:prstGeom prst="roundRect">
+            <a:avLst/>
+          </a:prstGeom>
+          <a:solidFill>
+            <a:srgbClr val="FFFFFF"/>
+          </a:solidFill>
+          <a:ln w="25400">
+            <a:solidFill>
+              <a:srgbClr val="F59E0B"/>
+            </a:solidFill>
+          </a:ln>
+        </p:spPr>
+        <p:style>
+          <a:lnRef idx="1">
+            <a:schemeClr val="accent1"/>
+          </a:lnRef>
+          <a:fillRef idx="3">
+            <a:schemeClr val="accent1"/>
+          </a:fillRef>
+          <a:effectRef idx="2">
+            <a:schemeClr val="accent1"/>
+          </a:effectRef>
+          <a:fontRef idx="minor">
+            <a:schemeClr val="lt1"/>
+          </a:fontRef>
+        </p:style>
+        <p:txBody>
+          <a:bodyPr rtlCol="0" anchor="ctr" wrap="square" lIns="182880" tIns="109728"/>
+          <a:lstStyle/>
+          <a:p>
+            <a:pPr algn="ctr">
+              <a:defRPr sz="1400" b="1">
+                <a:solidFill>
+                  <a:srgbClr val="F59E0B"/>
+                </a:solidFill>
+              </a:defRPr>
+            </a:pPr>
+            <a:r>
+              <a:t>7. Emotional Intelligence</a:t>
+            </a:r>
+          </a:p>
+          <a:p>
+            <a:pPr>
+              <a:spcBef>
+                <a:spcPts val="400"/>
+              </a:spcBef>
+              <a:defRPr sz="1000">
+                <a:solidFill>
+                  <a:srgbClr val="707080"/>
+                </a:solidFill>
+              </a:defRPr>
+            </a:pPr>
+            <a:r>
+              <a:t>Recognizing emotional cues &amp; tone shifts</a:t>
+            </a:r>
+          </a:p>
+        </p:txBody>
+      </p:sp>
+      <p:sp>
+        <p:nvSpPr>
+          <p:cNvPr id="13" name="Rounded Rectangle 12"/>
+          <p:cNvSpPr/>
+          <p:nvPr/>
+        </p:nvSpPr>
+        <p:spPr>
+          <a:xfrm>
+            <a:off x="6217920" y="4892040"/>
+            <a:ext cx="5120640" cy="1005840"/>
+          </a:xfrm>
+          <a:prstGeom prst="roundRect">
+            <a:avLst/>
+          </a:prstGeom>
+          <a:solidFill>
+            <a:srgbClr val="FFFFFF"/>
+          </a:solidFill>
+          <a:ln w="25400">
+            <a:solidFill>
+              <a:srgbClr val="16162A"/>
+            </a:solidFill>
+          </a:ln>
+        </p:spPr>
+        <p:style>
+          <a:lnRef idx="1">
+            <a:schemeClr val="accent1"/>
+          </a:lnRef>
+          <a:fillRef idx="3">
+            <a:schemeClr val="accent1"/>
+          </a:fillRef>
+          <a:effectRef idx="2">
+            <a:schemeClr val="accent1"/>
+          </a:effectRef>
+          <a:fontRef idx="minor">
+            <a:schemeClr val="lt1"/>
+          </a:fontRef>
+        </p:style>
+        <p:txBody>
+          <a:bodyPr rtlCol="0" anchor="ctr" wrap="square" lIns="182880" tIns="109728"/>
+          <a:lstStyle/>
+          <a:p>
+            <a:pPr algn="ctr">
+              <a:defRPr sz="1400" b="1">
                 <a:solidFill>
                   <a:srgbClr val="16162A"/>
                 </a:solidFill>
               </a:defRPr>
             </a:pPr>
             <a:r>
-              <a:t>• Gemma 4 AI Opponent: Nurse plays ❌ or ⭕ against Gemma 4 AI in real-time.</a:t>
+              <a:t>8. Clinical Confidence</a:t>
             </a:r>
           </a:p>
           <a:p>
             <a:pPr>
               <a:spcBef>
-                <a:spcPts val="1200"/>
+                <a:spcPts val="400"/>
               </a:spcBef>
-              <a:defRPr sz="1400">
-                <a:solidFill>
-                  <a:srgbClr val="16162A"/>
-                </a:solidFill>
-              </a:defRPr>
-            </a:pPr>
-            <a:r>
-              <a:t>• 3 Difficulty Modes: Easy (Casual Chill), Medium (Smart Rival), and Unbeatable (Gemma 4 Minimax Algorithm).</a:t>
-            </a:r>
-          </a:p>
-          <a:p>
-            <a:pPr>
-              <a:spcBef>
-                <a:spcPts val="1200"/>
-              </a:spcBef>
-              <a:defRPr sz="1400">
-                <a:solidFill>
-                  <a:srgbClr val="16162A"/>
-                </a:solidFill>
-              </a:defRPr>
-            </a:pPr>
-            <a:r>
-              <a:t>• Scoreboard &amp; Wellness Points: Tracks Nurse Wins, AI Wins, Draws, and awards Wellness Points.</a:t>
-            </a:r>
-          </a:p>
-          <a:p>
-            <a:pPr>
-              <a:spcBef>
-                <a:spcPts val="1200"/>
-              </a:spcBef>
-              <a:defRPr sz="1400">
-                <a:solidFill>
-                  <a:srgbClr val="16162A"/>
-                </a:solidFill>
-              </a:defRPr>
-            </a:pPr>
-            <a:r>
-              <a:t>• Live 10-Minute Break Timer: Keeps breaks structured so nurses return to duty on time.</a:t>
+              <a:defRPr sz="1000">
+                <a:solidFill>
+                  <a:srgbClr val="707080"/>
+                </a:solidFill>
+              </a:defRPr>
+            </a:pPr>
+            <a:r>
+              <a:t>Reassuring patient with clear healthcare guidance</a:t>
             </a:r>
           </a:p>
         </p:txBody>
@@ -4893,95 +6859,23 @@
       <p:grpSpPr/>
       <p:sp>
         <p:nvSpPr>
-          <p:cNvPr id="2" name="TextBox 1"/>
-          <p:cNvSpPr txBox="1"/>
-          <p:nvPr/>
-        </p:nvSpPr>
-        <p:spPr>
-          <a:xfrm>
-            <a:off x="731520" y="365760"/>
-            <a:ext cx="7315200" cy="365760"/>
-          </a:xfrm>
-          <a:prstGeom prst="rect">
-            <a:avLst/>
-          </a:prstGeom>
-          <a:noFill/>
-        </p:spPr>
-        <p:txBody>
-          <a:bodyPr wrap="none">
-            <a:spAutoFit/>
-          </a:bodyPr>
-          <a:lstStyle/>
-          <a:p>
-            <a:pPr>
-              <a:defRPr sz="1100" b="1">
-                <a:solidFill>
-                  <a:srgbClr val="5142C5"/>
-                </a:solidFill>
-              </a:defRPr>
-            </a:pPr>
-            <a:r>
-              <a:t>NURSEFLOW PLATFORM PRESENTATION</a:t>
-            </a:r>
-          </a:p>
-        </p:txBody>
-      </p:sp>
-      <p:sp>
-        <p:nvSpPr>
-          <p:cNvPr id="3" name="TextBox 2"/>
-          <p:cNvSpPr txBox="1"/>
-          <p:nvPr/>
-        </p:nvSpPr>
-        <p:spPr>
-          <a:xfrm>
-            <a:off x="731520" y="640080"/>
-            <a:ext cx="10058400" cy="731520"/>
-          </a:xfrm>
-          <a:prstGeom prst="rect">
-            <a:avLst/>
-          </a:prstGeom>
-          <a:noFill/>
-        </p:spPr>
-        <p:txBody>
-          <a:bodyPr wrap="none">
-            <a:spAutoFit/>
-          </a:bodyPr>
-          <a:lstStyle/>
-          <a:p>
-            <a:pPr>
-              <a:defRPr sz="2600" b="1">
-                <a:solidFill>
-                  <a:srgbClr val="16162A"/>
-                </a:solidFill>
-              </a:defRPr>
-            </a:pPr>
-            <a:r>
-              <a:t>Feature 4: Shift Swaps, Leave Management &amp; Socket.IO Alerts</a:t>
-            </a:r>
-          </a:p>
-        </p:txBody>
-      </p:sp>
-      <p:sp>
-        <p:nvSpPr>
-          <p:cNvPr id="4" name="Rounded Rectangle 3"/>
+          <p:cNvPr id="2" name="Rectangle 1"/>
           <p:cNvSpPr/>
           <p:nvPr/>
         </p:nvSpPr>
         <p:spPr>
           <a:xfrm>
-            <a:off x="731520" y="1645920"/>
-            <a:ext cx="3291840" cy="4389120"/>
-          </a:xfrm>
-          <a:prstGeom prst="roundRect">
+            <a:off x="731520" y="365760"/>
+            <a:ext cx="10728655" cy="36576"/>
+          </a:xfrm>
+          <a:prstGeom prst="rect">
             <a:avLst/>
           </a:prstGeom>
           <a:solidFill>
-            <a:srgbClr val="EDE9FE"/>
+            <a:srgbClr val="5142C5"/>
           </a:solidFill>
           <a:ln>
-            <a:solidFill>
-              <a:srgbClr val="5142C5"/>
-            </a:solidFill>
+            <a:noFill/>
           </a:ln>
         </p:spPr>
         <p:style>
@@ -4999,55 +6893,136 @@
           </a:fontRef>
         </p:style>
         <p:txBody>
-          <a:bodyPr rtlCol="0" anchor="ctr" wrap="square"/>
-          <a:lstStyle/>
-          <a:p>
-            <a:pPr algn="ctr">
-              <a:defRPr sz="1800" b="1">
+          <a:bodyPr rtlCol="0" anchor="ctr"/>
+          <a:lstStyle/>
+          <a:p>
+            <a:pPr algn="ctr"/>
+          </a:p>
+        </p:txBody>
+      </p:sp>
+      <p:sp>
+        <p:nvSpPr>
+          <p:cNvPr id="3" name="TextBox 2"/>
+          <p:cNvSpPr txBox="1"/>
+          <p:nvPr/>
+        </p:nvSpPr>
+        <p:spPr>
+          <a:xfrm>
+            <a:off x="731520" y="457200"/>
+            <a:ext cx="7315200" cy="320040"/>
+          </a:xfrm>
+          <a:prstGeom prst="rect">
+            <a:avLst/>
+          </a:prstGeom>
+          <a:noFill/>
+        </p:spPr>
+        <p:txBody>
+          <a:bodyPr wrap="square">
+            <a:spAutoFit/>
+          </a:bodyPr>
+          <a:lstStyle/>
+          <a:p>
+            <a:pPr>
+              <a:defRPr sz="1000" b="1">
+                <a:solidFill>
+                  <a:srgbClr val="5142C5"/>
+                </a:solidFill>
+              </a:defRPr>
+            </a:pPr>
+            <a:r>
+              <a:t>NURSEFLOW ENTERPRISE PLATFORM</a:t>
+            </a:r>
+          </a:p>
+        </p:txBody>
+      </p:sp>
+      <p:sp>
+        <p:nvSpPr>
+          <p:cNvPr id="4" name="TextBox 3"/>
+          <p:cNvSpPr txBox="1"/>
+          <p:nvPr/>
+        </p:nvSpPr>
+        <p:spPr>
+          <a:xfrm>
+            <a:off x="731520" y="731520"/>
+            <a:ext cx="10728655" cy="640080"/>
+          </a:xfrm>
+          <a:prstGeom prst="rect">
+            <a:avLst/>
+          </a:prstGeom>
+          <a:noFill/>
+        </p:spPr>
+        <p:txBody>
+          <a:bodyPr wrap="square">
+            <a:spAutoFit/>
+          </a:bodyPr>
+          <a:lstStyle/>
+          <a:p>
+            <a:pPr>
+              <a:defRPr sz="2400" b="1">
                 <a:solidFill>
                   <a:srgbClr val="16162A"/>
                 </a:solidFill>
               </a:defRPr>
             </a:pPr>
             <a:r>
-              <a:t>🔄 Shift Swap Requests</a:t>
-            </a:r>
-          </a:p>
-          <a:p>
-            <a:pPr>
-              <a:spcBef>
-                <a:spcPts val="1400"/>
-              </a:spcBef>
-              <a:defRPr sz="1300">
-                <a:solidFill>
-                  <a:srgbClr val="16162A"/>
-                </a:solidFill>
-              </a:defRPr>
-            </a:pPr>
-            <a:r>
-              <a:t>Nurse-to-nurse duty exchange system with target nurse selection, reason tracking, and 1-click admin approval workflows.</a:t>
-            </a:r>
-          </a:p>
-        </p:txBody>
-      </p:sp>
-      <p:sp>
-        <p:nvSpPr>
-          <p:cNvPr id="5" name="Rounded Rectangle 4"/>
+              <a:t>Core Module 3: AI Tick &amp; Cross (Tic-Tac-Toe ❌⭕) Break Game</a:t>
+            </a:r>
+          </a:p>
+        </p:txBody>
+      </p:sp>
+      <p:sp>
+        <p:nvSpPr>
+          <p:cNvPr id="5" name="TextBox 4"/>
+          <p:cNvSpPr txBox="1"/>
+          <p:nvPr/>
+        </p:nvSpPr>
+        <p:spPr>
+          <a:xfrm>
+            <a:off x="731520" y="6400800"/>
+            <a:ext cx="10728655" cy="365760"/>
+          </a:xfrm>
+          <a:prstGeom prst="rect">
+            <a:avLst/>
+          </a:prstGeom>
+          <a:noFill/>
+        </p:spPr>
+        <p:txBody>
+          <a:bodyPr wrap="square">
+            <a:spAutoFit/>
+          </a:bodyPr>
+          <a:lstStyle/>
+          <a:p>
+            <a:pPr>
+              <a:defRPr sz="900">
+                <a:solidFill>
+                  <a:srgbClr val="707080"/>
+                </a:solidFill>
+              </a:defRPr>
+            </a:pPr>
+            <a:r>
+              <a:t>NurseFlow Platform Presentation  |  Slide 7 of 12  |  Arbisoft-GDG Hackathon 2026</a:t>
+            </a:r>
+          </a:p>
+        </p:txBody>
+      </p:sp>
+      <p:sp>
+        <p:nvSpPr>
+          <p:cNvPr id="6" name="Rounded Rectangle 5"/>
           <p:cNvSpPr/>
           <p:nvPr/>
         </p:nvSpPr>
         <p:spPr>
           <a:xfrm>
-            <a:off x="4389120" y="1645920"/>
-            <a:ext cx="3291840" cy="4389120"/>
+            <a:off x="731520" y="1463040"/>
+            <a:ext cx="10728655" cy="4572000"/>
           </a:xfrm>
           <a:prstGeom prst="roundRect">
             <a:avLst/>
           </a:prstGeom>
           <a:solidFill>
-            <a:srgbClr val="EDE9FE"/>
+            <a:srgbClr val="FFFFFF"/>
           </a:solidFill>
-          <a:ln>
+          <a:ln w="25400">
             <a:solidFill>
               <a:srgbClr val="5142C5"/>
             </a:solidFill>
@@ -5068,24 +7043,24 @@
           </a:fontRef>
         </p:style>
         <p:txBody>
-          <a:bodyPr rtlCol="0" anchor="ctr" wrap="square"/>
+          <a:bodyPr rtlCol="0" anchor="ctr" wrap="square" lIns="274320" tIns="274320"/>
           <a:lstStyle/>
           <a:p>
             <a:pPr algn="ctr">
-              <a:defRPr sz="1800" b="1">
-                <a:solidFill>
-                  <a:srgbClr val="16162A"/>
-                </a:solidFill>
-              </a:defRPr>
-            </a:pPr>
-            <a:r>
-              <a:t>🏖️ Leave Request Portal</a:t>
+              <a:defRPr sz="2000" b="1">
+                <a:solidFill>
+                  <a:srgbClr val="5142C5"/>
+                </a:solidFill>
+              </a:defRPr>
+            </a:pPr>
+            <a:r>
+              <a:t>🎮 Nurse Shift Break Relaxation Lounge</a:t>
             </a:r>
           </a:p>
           <a:p>
             <a:pPr>
               <a:spcBef>
-                <a:spcPts val="1400"/>
+                <a:spcPts val="1000"/>
               </a:spcBef>
               <a:defRPr sz="1300">
                 <a:solidFill>
@@ -5094,67 +7069,13 @@
               </a:defRPr>
             </a:pPr>
             <a:r>
-              <a:t>Annual, Sick, and Emergency leave applications with date range selectors, status badges (Pending, Approved, Rejected).</a:t>
-            </a:r>
-          </a:p>
-        </p:txBody>
-      </p:sp>
-      <p:sp>
-        <p:nvSpPr>
-          <p:cNvPr id="6" name="Rounded Rectangle 5"/>
-          <p:cNvSpPr/>
-          <p:nvPr/>
-        </p:nvSpPr>
-        <p:spPr>
-          <a:xfrm>
-            <a:off x="8046720" y="1645920"/>
-            <a:ext cx="3291840" cy="4389120"/>
-          </a:xfrm>
-          <a:prstGeom prst="roundRect">
-            <a:avLst/>
-          </a:prstGeom>
-          <a:solidFill>
-            <a:srgbClr val="EDE9FE"/>
-          </a:solidFill>
-          <a:ln>
-            <a:solidFill>
-              <a:srgbClr val="5142C5"/>
-            </a:solidFill>
-          </a:ln>
-        </p:spPr>
-        <p:style>
-          <a:lnRef idx="1">
-            <a:schemeClr val="accent1"/>
-          </a:lnRef>
-          <a:fillRef idx="3">
-            <a:schemeClr val="accent1"/>
-          </a:fillRef>
-          <a:effectRef idx="2">
-            <a:schemeClr val="accent1"/>
-          </a:effectRef>
-          <a:fontRef idx="minor">
-            <a:schemeClr val="lt1"/>
-          </a:fontRef>
-        </p:style>
-        <p:txBody>
-          <a:bodyPr rtlCol="0" anchor="ctr" wrap="square"/>
-          <a:lstStyle/>
-          <a:p>
-            <a:pPr algn="ctr">
-              <a:defRPr sz="1800" b="1">
-                <a:solidFill>
-                  <a:srgbClr val="16162A"/>
-                </a:solidFill>
-              </a:defRPr>
-            </a:pPr>
-            <a:r>
-              <a:t>⚡ Socket.IO Push Alerts</a:t>
+              <a:t>• 100% Non-Medical Relaxation: Pure fun mini-game designed for 10-minute shift breaks to help nurses feel refreshed.</a:t>
             </a:r>
           </a:p>
           <a:p>
             <a:pPr>
               <a:spcBef>
-                <a:spcPts val="1400"/>
+                <a:spcPts val="1000"/>
               </a:spcBef>
               <a:defRPr sz="1300">
                 <a:solidFill>
@@ -5163,7 +7084,67 @@
               </a:defRPr>
             </a:pPr>
             <a:r>
-              <a:t>Real-time WebSocket event dispatch for instant emergency broadcasts, roster updates, and unread notification counts.</a:t>
+              <a:t>• Gemma 4 AI Opponent: Nurse plays ❌ or ⭕ against Gemma 4 AI in real-time.</a:t>
+            </a:r>
+          </a:p>
+          <a:p>
+            <a:pPr>
+              <a:spcBef>
+                <a:spcPts val="1000"/>
+              </a:spcBef>
+              <a:defRPr sz="1300">
+                <a:solidFill>
+                  <a:srgbClr val="16162A"/>
+                </a:solidFill>
+              </a:defRPr>
+            </a:pPr>
+            <a:r>
+              <a:t>• 3 Difficulty Modes: Easy (Casual Chill), Medium (Smart Rival), and Unbeatable (Minimax Algorithm).</a:t>
+            </a:r>
+          </a:p>
+          <a:p>
+            <a:pPr>
+              <a:spcBef>
+                <a:spcPts val="1000"/>
+              </a:spcBef>
+              <a:defRPr sz="1300">
+                <a:solidFill>
+                  <a:srgbClr val="16162A"/>
+                </a:solidFill>
+              </a:defRPr>
+            </a:pPr>
+            <a:r>
+              <a:t>• Minimax Decision Tree Algorithm: Evaluates move trees up to depth 6 for optimal move selection.</a:t>
+            </a:r>
+          </a:p>
+          <a:p>
+            <a:pPr>
+              <a:spcBef>
+                <a:spcPts val="1000"/>
+              </a:spcBef>
+              <a:defRPr sz="1300">
+                <a:solidFill>
+                  <a:srgbClr val="16162A"/>
+                </a:solidFill>
+              </a:defRPr>
+            </a:pPr>
+            <a:r>
+              <a:t>• Scoreboard &amp; Wellness Points: Tracks Nurse Wins, AI Wins, Draws, and awards Wellness Points to NurseGameScore model.</a:t>
+            </a:r>
+          </a:p>
+          <a:p>
+            <a:pPr>
+              <a:spcBef>
+                <a:spcPts val="1000"/>
+              </a:spcBef>
+              <a:defRPr sz="1300">
+                <a:solidFill>
+                  <a:srgbClr val="16162A"/>
+                </a:solidFill>
+              </a:defRPr>
+            </a:pPr>
+            <a:r>
+              <a:t>• Live 10-Minute Break Timer: Built-in countdown timer ensures shift breaks stay structured.</a:t>
             </a:r>
           </a:p>
         </p:txBody>
@@ -5188,91 +7169,24 @@
       <p:grpSpPr/>
       <p:sp>
         <p:nvSpPr>
-          <p:cNvPr id="2" name="TextBox 1"/>
-          <p:cNvSpPr txBox="1"/>
-          <p:nvPr/>
-        </p:nvSpPr>
-        <p:spPr>
-          <a:xfrm>
-            <a:off x="731520" y="365760"/>
-            <a:ext cx="7315200" cy="365760"/>
-          </a:xfrm>
-          <a:prstGeom prst="rect">
-            <a:avLst/>
-          </a:prstGeom>
-          <a:noFill/>
-        </p:spPr>
-        <p:txBody>
-          <a:bodyPr wrap="none">
-            <a:spAutoFit/>
-          </a:bodyPr>
-          <a:lstStyle/>
-          <a:p>
-            <a:pPr>
-              <a:defRPr sz="1100" b="1">
-                <a:solidFill>
-                  <a:srgbClr val="5142C5"/>
-                </a:solidFill>
-              </a:defRPr>
-            </a:pPr>
-            <a:r>
-              <a:t>NURSEFLOW PLATFORM PRESENTATION</a:t>
-            </a:r>
-          </a:p>
-        </p:txBody>
-      </p:sp>
-      <p:sp>
-        <p:nvSpPr>
-          <p:cNvPr id="3" name="TextBox 2"/>
-          <p:cNvSpPr txBox="1"/>
-          <p:nvPr/>
-        </p:nvSpPr>
-        <p:spPr>
-          <a:xfrm>
-            <a:off x="731520" y="640080"/>
-            <a:ext cx="10058400" cy="731520"/>
-          </a:xfrm>
-          <a:prstGeom prst="rect">
-            <a:avLst/>
-          </a:prstGeom>
-          <a:noFill/>
-        </p:spPr>
-        <p:txBody>
-          <a:bodyPr wrap="none">
-            <a:spAutoFit/>
-          </a:bodyPr>
-          <a:lstStyle/>
-          <a:p>
-            <a:pPr>
-              <a:defRPr sz="2600" b="1">
-                <a:solidFill>
-                  <a:srgbClr val="16162A"/>
-                </a:solidFill>
-              </a:defRPr>
-            </a:pPr>
-            <a:r>
-              <a:t>Design System &amp; Photorealistic Nurse Visuals</a:t>
-            </a:r>
-          </a:p>
-        </p:txBody>
-      </p:sp>
-      <p:sp>
-        <p:nvSpPr>
-          <p:cNvPr id="4" name="Rounded Rectangle 3"/>
+          <p:cNvPr id="2" name="Rectangle 1"/>
           <p:cNvSpPr/>
           <p:nvPr/>
         </p:nvSpPr>
         <p:spPr>
           <a:xfrm>
-            <a:off x="731520" y="1645920"/>
-            <a:ext cx="10607040" cy="4389120"/>
-          </a:xfrm>
-          <a:prstGeom prst="roundRect">
+            <a:off x="731520" y="365760"/>
+            <a:ext cx="10728655" cy="36576"/>
+          </a:xfrm>
+          <a:prstGeom prst="rect">
             <a:avLst/>
           </a:prstGeom>
           <a:solidFill>
-            <a:srgbClr val="16162A"/>
+            <a:srgbClr val="5142C5"/>
           </a:solidFill>
+          <a:ln>
+            <a:noFill/>
+          </a:ln>
         </p:spPr>
         <p:style>
           <a:lnRef idx="1">
@@ -5289,18 +7203,168 @@
           </a:fontRef>
         </p:style>
         <p:txBody>
-          <a:bodyPr rtlCol="0" anchor="ctr" wrap="square"/>
+          <a:bodyPr rtlCol="0" anchor="ctr"/>
+          <a:lstStyle/>
+          <a:p>
+            <a:pPr algn="ctr"/>
+          </a:p>
+        </p:txBody>
+      </p:sp>
+      <p:sp>
+        <p:nvSpPr>
+          <p:cNvPr id="3" name="TextBox 2"/>
+          <p:cNvSpPr txBox="1"/>
+          <p:nvPr/>
+        </p:nvSpPr>
+        <p:spPr>
+          <a:xfrm>
+            <a:off x="731520" y="457200"/>
+            <a:ext cx="7315200" cy="320040"/>
+          </a:xfrm>
+          <a:prstGeom prst="rect">
+            <a:avLst/>
+          </a:prstGeom>
+          <a:noFill/>
+        </p:spPr>
+        <p:txBody>
+          <a:bodyPr wrap="square">
+            <a:spAutoFit/>
+          </a:bodyPr>
+          <a:lstStyle/>
+          <a:p>
+            <a:pPr>
+              <a:defRPr sz="1000" b="1">
+                <a:solidFill>
+                  <a:srgbClr val="5142C5"/>
+                </a:solidFill>
+              </a:defRPr>
+            </a:pPr>
+            <a:r>
+              <a:t>NURSEFLOW ENTERPRISE PLATFORM</a:t>
+            </a:r>
+          </a:p>
+        </p:txBody>
+      </p:sp>
+      <p:sp>
+        <p:nvSpPr>
+          <p:cNvPr id="4" name="TextBox 3"/>
+          <p:cNvSpPr txBox="1"/>
+          <p:nvPr/>
+        </p:nvSpPr>
+        <p:spPr>
+          <a:xfrm>
+            <a:off x="731520" y="731520"/>
+            <a:ext cx="10728655" cy="640080"/>
+          </a:xfrm>
+          <a:prstGeom prst="rect">
+            <a:avLst/>
+          </a:prstGeom>
+          <a:noFill/>
+        </p:spPr>
+        <p:txBody>
+          <a:bodyPr wrap="square">
+            <a:spAutoFit/>
+          </a:bodyPr>
+          <a:lstStyle/>
+          <a:p>
+            <a:pPr>
+              <a:defRPr sz="2400" b="1">
+                <a:solidFill>
+                  <a:srgbClr val="16162A"/>
+                </a:solidFill>
+              </a:defRPr>
+            </a:pPr>
+            <a:r>
+              <a:t>Core Module 4: Shift Swaps, Leave Portal &amp; Socket.IO Push Alerts</a:t>
+            </a:r>
+          </a:p>
+        </p:txBody>
+      </p:sp>
+      <p:sp>
+        <p:nvSpPr>
+          <p:cNvPr id="5" name="TextBox 4"/>
+          <p:cNvSpPr txBox="1"/>
+          <p:nvPr/>
+        </p:nvSpPr>
+        <p:spPr>
+          <a:xfrm>
+            <a:off x="731520" y="6400800"/>
+            <a:ext cx="10728655" cy="365760"/>
+          </a:xfrm>
+          <a:prstGeom prst="rect">
+            <a:avLst/>
+          </a:prstGeom>
+          <a:noFill/>
+        </p:spPr>
+        <p:txBody>
+          <a:bodyPr wrap="square">
+            <a:spAutoFit/>
+          </a:bodyPr>
+          <a:lstStyle/>
+          <a:p>
+            <a:pPr>
+              <a:defRPr sz="900">
+                <a:solidFill>
+                  <a:srgbClr val="707080"/>
+                </a:solidFill>
+              </a:defRPr>
+            </a:pPr>
+            <a:r>
+              <a:t>NurseFlow Platform Presentation  |  Slide 8 of 12  |  Arbisoft-GDG Hackathon 2026</a:t>
+            </a:r>
+          </a:p>
+        </p:txBody>
+      </p:sp>
+      <p:sp>
+        <p:nvSpPr>
+          <p:cNvPr id="6" name="Rounded Rectangle 5"/>
+          <p:cNvSpPr/>
+          <p:nvPr/>
+        </p:nvSpPr>
+        <p:spPr>
+          <a:xfrm>
+            <a:off x="731520" y="1463040"/>
+            <a:ext cx="3328416" cy="4572000"/>
+          </a:xfrm>
+          <a:prstGeom prst="roundRect">
+            <a:avLst/>
+          </a:prstGeom>
+          <a:solidFill>
+            <a:srgbClr val="EDE9FE"/>
+          </a:solidFill>
+          <a:ln w="25400">
+            <a:solidFill>
+              <a:srgbClr val="5142C5"/>
+            </a:solidFill>
+          </a:ln>
+        </p:spPr>
+        <p:style>
+          <a:lnRef idx="1">
+            <a:schemeClr val="accent1"/>
+          </a:lnRef>
+          <a:fillRef idx="3">
+            <a:schemeClr val="accent1"/>
+          </a:fillRef>
+          <a:effectRef idx="2">
+            <a:schemeClr val="accent1"/>
+          </a:effectRef>
+          <a:fontRef idx="minor">
+            <a:schemeClr val="lt1"/>
+          </a:fontRef>
+        </p:style>
+        <p:txBody>
+          <a:bodyPr rtlCol="0" anchor="ctr" wrap="square" lIns="182880" tIns="274320"/>
           <a:lstStyle/>
           <a:p>
             <a:pPr algn="ctr">
-              <a:defRPr sz="2200" b="1">
-                <a:solidFill>
-                  <a:srgbClr val="FACC15"/>
-                </a:solidFill>
-              </a:defRPr>
-            </a:pPr>
-            <a:r>
-              <a:t>🎨 High-End Premium Aesthetics</a:t>
+              <a:defRPr sz="1600" b="1">
+                <a:solidFill>
+                  <a:srgbClr val="16162A"/>
+                </a:solidFill>
+              </a:defRPr>
+            </a:pPr>
+            <a:r>
+              <a:t>🔄 Shift Swap Requests</a:t>
             </a:r>
           </a:p>
           <a:p>
@@ -5308,14 +7372,68 @@
               <a:spcBef>
                 <a:spcPts val="1400"/>
               </a:spcBef>
-              <a:defRPr sz="1400">
-                <a:solidFill>
-                  <a:srgbClr val="FFFFFF"/>
-                </a:solidFill>
-              </a:defRPr>
-            </a:pPr>
-            <a:r>
-              <a:t>✓ Curated HSL Color Palette: Deep Purple (#5142C5), Dark Purple (#16162A), Light Purple (#EDE9FE).</a:t>
+              <a:defRPr sz="1200">
+                <a:solidFill>
+                  <a:srgbClr val="16162A"/>
+                </a:solidFill>
+              </a:defRPr>
+            </a:pPr>
+            <a:r>
+              <a:t>Nurse-to-nurse duty exchange requests with peer selection, reason tracking, and 1-click admin approval workflows.</a:t>
+            </a:r>
+          </a:p>
+        </p:txBody>
+      </p:sp>
+      <p:sp>
+        <p:nvSpPr>
+          <p:cNvPr id="7" name="Rounded Rectangle 6"/>
+          <p:cNvSpPr/>
+          <p:nvPr/>
+        </p:nvSpPr>
+        <p:spPr>
+          <a:xfrm>
+            <a:off x="4425696" y="1463040"/>
+            <a:ext cx="3328416" cy="4572000"/>
+          </a:xfrm>
+          <a:prstGeom prst="roundRect">
+            <a:avLst/>
+          </a:prstGeom>
+          <a:solidFill>
+            <a:srgbClr val="EDE9FE"/>
+          </a:solidFill>
+          <a:ln w="25400">
+            <a:solidFill>
+              <a:srgbClr val="F59E0B"/>
+            </a:solidFill>
+          </a:ln>
+        </p:spPr>
+        <p:style>
+          <a:lnRef idx="1">
+            <a:schemeClr val="accent1"/>
+          </a:lnRef>
+          <a:fillRef idx="3">
+            <a:schemeClr val="accent1"/>
+          </a:fillRef>
+          <a:effectRef idx="2">
+            <a:schemeClr val="accent1"/>
+          </a:effectRef>
+          <a:fontRef idx="minor">
+            <a:schemeClr val="lt1"/>
+          </a:fontRef>
+        </p:style>
+        <p:txBody>
+          <a:bodyPr rtlCol="0" anchor="ctr" wrap="square" lIns="182880" tIns="274320"/>
+          <a:lstStyle/>
+          <a:p>
+            <a:pPr algn="ctr">
+              <a:defRPr sz="1600" b="1">
+                <a:solidFill>
+                  <a:srgbClr val="16162A"/>
+                </a:solidFill>
+              </a:defRPr>
+            </a:pPr>
+            <a:r>
+              <a:t>🏖️ Leave Request Portal</a:t>
             </a:r>
           </a:p>
           <a:p>
@@ -5323,14 +7441,68 @@
               <a:spcBef>
                 <a:spcPts val="1400"/>
               </a:spcBef>
-              <a:defRPr sz="1400">
-                <a:solidFill>
-                  <a:srgbClr val="FFFFFF"/>
-                </a:solidFill>
-              </a:defRPr>
-            </a:pPr>
-            <a:r>
-              <a:t>✓ Glassmorphism &amp; Micro-animations: Liquid glass buttons (bg-white/15 backdrop-blur-md) and smooth hover micro-animations.</a:t>
+              <a:defRPr sz="1200">
+                <a:solidFill>
+                  <a:srgbClr val="16162A"/>
+                </a:solidFill>
+              </a:defRPr>
+            </a:pPr>
+            <a:r>
+              <a:t>Annual, Sick, and Emergency leave applications with date range selection and status badges (Pending, Approved, Rejected).</a:t>
+            </a:r>
+          </a:p>
+        </p:txBody>
+      </p:sp>
+      <p:sp>
+        <p:nvSpPr>
+          <p:cNvPr id="8" name="Rounded Rectangle 7"/>
+          <p:cNvSpPr/>
+          <p:nvPr/>
+        </p:nvSpPr>
+        <p:spPr>
+          <a:xfrm>
+            <a:off x="8119871" y="1463040"/>
+            <a:ext cx="3328416" cy="4572000"/>
+          </a:xfrm>
+          <a:prstGeom prst="roundRect">
+            <a:avLst/>
+          </a:prstGeom>
+          <a:solidFill>
+            <a:srgbClr val="EDE9FE"/>
+          </a:solidFill>
+          <a:ln w="25400">
+            <a:solidFill>
+              <a:srgbClr val="059669"/>
+            </a:solidFill>
+          </a:ln>
+        </p:spPr>
+        <p:style>
+          <a:lnRef idx="1">
+            <a:schemeClr val="accent1"/>
+          </a:lnRef>
+          <a:fillRef idx="3">
+            <a:schemeClr val="accent1"/>
+          </a:fillRef>
+          <a:effectRef idx="2">
+            <a:schemeClr val="accent1"/>
+          </a:effectRef>
+          <a:fontRef idx="minor">
+            <a:schemeClr val="lt1"/>
+          </a:fontRef>
+        </p:style>
+        <p:txBody>
+          <a:bodyPr rtlCol="0" anchor="ctr" wrap="square" lIns="182880" tIns="274320"/>
+          <a:lstStyle/>
+          <a:p>
+            <a:pPr algn="ctr">
+              <a:defRPr sz="1600" b="1">
+                <a:solidFill>
+                  <a:srgbClr val="16162A"/>
+                </a:solidFill>
+              </a:defRPr>
+            </a:pPr>
+            <a:r>
+              <a:t>⚡ Socket.IO Push Alerts</a:t>
             </a:r>
           </a:p>
           <a:p>
@@ -5338,29 +7510,14 @@
               <a:spcBef>
                 <a:spcPts val="1400"/>
               </a:spcBef>
-              <a:defRPr sz="1400">
-                <a:solidFill>
-                  <a:srgbClr val="FFFFFF"/>
-                </a:solidFill>
-              </a:defRPr>
-            </a:pPr>
-            <a:r>
-              <a:t>✓ Photorealistic 8K Nurse Avatars: Generated realistic portraits of BOTH a female nurse wearing full hijab and a male nurse together side-by-side (no cartoon avatars).</a:t>
-            </a:r>
-          </a:p>
-          <a:p>
-            <a:pPr>
-              <a:spcBef>
-                <a:spcPts val="1400"/>
-              </a:spcBef>
-              <a:defRPr sz="1400">
-                <a:solidFill>
-                  <a:srgbClr val="FFFFFF"/>
-                </a:solidFill>
-              </a:defRPr>
-            </a:pPr>
-            <a:r>
-              <a:t>✓ Responsive Grid Layouts: Optimized for Desktop, Tablet, and Mobile viewports with bottom navigation tabs.</a:t>
+              <a:defRPr sz="1200">
+                <a:solidFill>
+                  <a:srgbClr val="16162A"/>
+                </a:solidFill>
+              </a:defRPr>
+            </a:pPr>
+            <a:r>
+              <a:t>Bi-directional WebSocket event engine for instant emergency ward broadcasts and unread notification badge updates.</a:t>
             </a:r>
           </a:p>
         </p:txBody>
@@ -5385,95 +7542,23 @@
       <p:grpSpPr/>
       <p:sp>
         <p:nvSpPr>
-          <p:cNvPr id="2" name="TextBox 1"/>
-          <p:cNvSpPr txBox="1"/>
-          <p:nvPr/>
-        </p:nvSpPr>
-        <p:spPr>
-          <a:xfrm>
-            <a:off x="731520" y="365760"/>
-            <a:ext cx="7315200" cy="365760"/>
-          </a:xfrm>
-          <a:prstGeom prst="rect">
-            <a:avLst/>
-          </a:prstGeom>
-          <a:noFill/>
-        </p:spPr>
-        <p:txBody>
-          <a:bodyPr wrap="none">
-            <a:spAutoFit/>
-          </a:bodyPr>
-          <a:lstStyle/>
-          <a:p>
-            <a:pPr>
-              <a:defRPr sz="1100" b="1">
-                <a:solidFill>
-                  <a:srgbClr val="5142C5"/>
-                </a:solidFill>
-              </a:defRPr>
-            </a:pPr>
-            <a:r>
-              <a:t>NURSEFLOW PLATFORM PRESENTATION</a:t>
-            </a:r>
-          </a:p>
-        </p:txBody>
-      </p:sp>
-      <p:sp>
-        <p:nvSpPr>
-          <p:cNvPr id="3" name="TextBox 2"/>
-          <p:cNvSpPr txBox="1"/>
-          <p:nvPr/>
-        </p:nvSpPr>
-        <p:spPr>
-          <a:xfrm>
-            <a:off x="731520" y="640080"/>
-            <a:ext cx="10058400" cy="731520"/>
-          </a:xfrm>
-          <a:prstGeom prst="rect">
-            <a:avLst/>
-          </a:prstGeom>
-          <a:noFill/>
-        </p:spPr>
-        <p:txBody>
-          <a:bodyPr wrap="none">
-            <a:spAutoFit/>
-          </a:bodyPr>
-          <a:lstStyle/>
-          <a:p>
-            <a:pPr>
-              <a:defRPr sz="2600" b="1">
-                <a:solidFill>
-                  <a:srgbClr val="16162A"/>
-                </a:solidFill>
-              </a:defRPr>
-            </a:pPr>
-            <a:r>
-              <a:t>API Architecture &amp; Complete REST Endpoints</a:t>
-            </a:r>
-          </a:p>
-        </p:txBody>
-      </p:sp>
-      <p:sp>
-        <p:nvSpPr>
-          <p:cNvPr id="4" name="Rounded Rectangle 3"/>
+          <p:cNvPr id="2" name="Rectangle 1"/>
           <p:cNvSpPr/>
           <p:nvPr/>
         </p:nvSpPr>
         <p:spPr>
           <a:xfrm>
-            <a:off x="731520" y="1645920"/>
-            <a:ext cx="10607040" cy="685800"/>
-          </a:xfrm>
-          <a:prstGeom prst="roundRect">
+            <a:off x="731520" y="365760"/>
+            <a:ext cx="10728655" cy="36576"/>
+          </a:xfrm>
+          <a:prstGeom prst="rect">
             <a:avLst/>
           </a:prstGeom>
           <a:solidFill>
-            <a:srgbClr val="EDE9FE"/>
+            <a:srgbClr val="5142C5"/>
           </a:solidFill>
           <a:ln>
-            <a:solidFill>
-              <a:srgbClr val="5142C5"/>
-            </a:solidFill>
+            <a:noFill/>
           </a:ln>
         </p:spPr>
         <p:style>
@@ -5494,37 +7579,133 @@
           <a:bodyPr rtlCol="0" anchor="ctr"/>
           <a:lstStyle/>
           <a:p>
-            <a:pPr algn="ctr">
-              <a:defRPr sz="1300" b="1">
+            <a:pPr algn="ctr"/>
+          </a:p>
+        </p:txBody>
+      </p:sp>
+      <p:sp>
+        <p:nvSpPr>
+          <p:cNvPr id="3" name="TextBox 2"/>
+          <p:cNvSpPr txBox="1"/>
+          <p:nvPr/>
+        </p:nvSpPr>
+        <p:spPr>
+          <a:xfrm>
+            <a:off x="731520" y="457200"/>
+            <a:ext cx="7315200" cy="320040"/>
+          </a:xfrm>
+          <a:prstGeom prst="rect">
+            <a:avLst/>
+          </a:prstGeom>
+          <a:noFill/>
+        </p:spPr>
+        <p:txBody>
+          <a:bodyPr wrap="square">
+            <a:spAutoFit/>
+          </a:bodyPr>
+          <a:lstStyle/>
+          <a:p>
+            <a:pPr>
+              <a:defRPr sz="1000" b="1">
+                <a:solidFill>
+                  <a:srgbClr val="5142C5"/>
+                </a:solidFill>
+              </a:defRPr>
+            </a:pPr>
+            <a:r>
+              <a:t>NURSEFLOW ENTERPRISE PLATFORM</a:t>
+            </a:r>
+          </a:p>
+        </p:txBody>
+      </p:sp>
+      <p:sp>
+        <p:nvSpPr>
+          <p:cNvPr id="4" name="TextBox 3"/>
+          <p:cNvSpPr txBox="1"/>
+          <p:nvPr/>
+        </p:nvSpPr>
+        <p:spPr>
+          <a:xfrm>
+            <a:off x="731520" y="731520"/>
+            <a:ext cx="10728655" cy="640080"/>
+          </a:xfrm>
+          <a:prstGeom prst="rect">
+            <a:avLst/>
+          </a:prstGeom>
+          <a:noFill/>
+        </p:spPr>
+        <p:txBody>
+          <a:bodyPr wrap="square">
+            <a:spAutoFit/>
+          </a:bodyPr>
+          <a:lstStyle/>
+          <a:p>
+            <a:pPr>
+              <a:defRPr sz="2400" b="1">
                 <a:solidFill>
                   <a:srgbClr val="16162A"/>
                 </a:solidFill>
               </a:defRPr>
             </a:pPr>
             <a:r>
-              <a:t>Authentication (/api/auth)  ➔  POST /login, POST /register, GET /me</a:t>
-            </a:r>
-          </a:p>
-        </p:txBody>
-      </p:sp>
-      <p:sp>
-        <p:nvSpPr>
-          <p:cNvPr id="5" name="Rounded Rectangle 4"/>
+              <a:t>Relational Database Architecture (Prisma ORM &amp; SQLite)</a:t>
+            </a:r>
+          </a:p>
+        </p:txBody>
+      </p:sp>
+      <p:sp>
+        <p:nvSpPr>
+          <p:cNvPr id="5" name="TextBox 4"/>
+          <p:cNvSpPr txBox="1"/>
+          <p:nvPr/>
+        </p:nvSpPr>
+        <p:spPr>
+          <a:xfrm>
+            <a:off x="731520" y="6400800"/>
+            <a:ext cx="10728655" cy="365760"/>
+          </a:xfrm>
+          <a:prstGeom prst="rect">
+            <a:avLst/>
+          </a:prstGeom>
+          <a:noFill/>
+        </p:spPr>
+        <p:txBody>
+          <a:bodyPr wrap="square">
+            <a:spAutoFit/>
+          </a:bodyPr>
+          <a:lstStyle/>
+          <a:p>
+            <a:pPr>
+              <a:defRPr sz="900">
+                <a:solidFill>
+                  <a:srgbClr val="707080"/>
+                </a:solidFill>
+              </a:defRPr>
+            </a:pPr>
+            <a:r>
+              <a:t>NurseFlow Platform Presentation  |  Slide 9 of 12  |  Arbisoft-GDG Hackathon 2026</a:t>
+            </a:r>
+          </a:p>
+        </p:txBody>
+      </p:sp>
+      <p:sp>
+        <p:nvSpPr>
+          <p:cNvPr id="6" name="Rounded Rectangle 5"/>
           <p:cNvSpPr/>
           <p:nvPr/>
         </p:nvSpPr>
         <p:spPr>
           <a:xfrm>
-            <a:off x="731520" y="2423160"/>
-            <a:ext cx="10607040" cy="685800"/>
+            <a:off x="731520" y="1463040"/>
+            <a:ext cx="5120640" cy="1371600"/>
           </a:xfrm>
           <a:prstGeom prst="roundRect">
             <a:avLst/>
           </a:prstGeom>
           <a:solidFill>
-            <a:srgbClr val="EDE9FE"/>
+            <a:srgbClr val="FFFFFF"/>
           </a:solidFill>
-          <a:ln>
+          <a:ln w="25400">
             <a:solidFill>
               <a:srgbClr val="5142C5"/>
             </a:solidFill>
@@ -5545,42 +7726,57 @@
           </a:fontRef>
         </p:style>
         <p:txBody>
-          <a:bodyPr rtlCol="0" anchor="ctr"/>
+          <a:bodyPr rtlCol="0" anchor="ctr" wrap="square" lIns="182880" tIns="137160"/>
           <a:lstStyle/>
           <a:p>
             <a:pPr algn="ctr">
-              <a:defRPr sz="1300" b="1">
-                <a:solidFill>
-                  <a:srgbClr val="16162A"/>
-                </a:solidFill>
-              </a:defRPr>
-            </a:pPr>
-            <a:r>
-              <a:t>Staff &amp; Users (/api/users)  ➔  GET /, GET /:id, PATCH /:id</a:t>
-            </a:r>
-          </a:p>
-        </p:txBody>
-      </p:sp>
-      <p:sp>
-        <p:nvSpPr>
-          <p:cNvPr id="6" name="Rounded Rectangle 5"/>
+              <a:defRPr sz="1500" b="1">
+                <a:solidFill>
+                  <a:srgbClr val="5142C5"/>
+                </a:solidFill>
+              </a:defRPr>
+            </a:pPr>
+            <a:r>
+              <a:t>Model: User</a:t>
+            </a:r>
+          </a:p>
+          <a:p>
+            <a:pPr>
+              <a:spcBef>
+                <a:spcPts val="600"/>
+              </a:spcBef>
+              <a:defRPr sz="1100">
+                <a:solidFill>
+                  <a:srgbClr val="707080"/>
+                </a:solidFill>
+              </a:defRPr>
+            </a:pPr>
+            <a:r>
+              <a:t>Fields: id, name, email, passwordHash, role, employeeId, departmentId</a:t>
+            </a:r>
+          </a:p>
+        </p:txBody>
+      </p:sp>
+      <p:sp>
+        <p:nvSpPr>
+          <p:cNvPr id="7" name="Rounded Rectangle 6"/>
           <p:cNvSpPr/>
           <p:nvPr/>
         </p:nvSpPr>
         <p:spPr>
           <a:xfrm>
-            <a:off x="731520" y="3200400"/>
-            <a:ext cx="10607040" cy="685800"/>
+            <a:off x="731520" y="2971800"/>
+            <a:ext cx="5120640" cy="1371600"/>
           </a:xfrm>
           <a:prstGeom prst="roundRect">
             <a:avLst/>
           </a:prstGeom>
           <a:solidFill>
-            <a:srgbClr val="EDE9FE"/>
+            <a:srgbClr val="FFFFFF"/>
           </a:solidFill>
-          <a:ln>
+          <a:ln w="25400">
             <a:solidFill>
-              <a:srgbClr val="5142C5"/>
+              <a:srgbClr val="16162A"/>
             </a:solidFill>
           </a:ln>
         </p:spPr>
@@ -5599,42 +7795,57 @@
           </a:fontRef>
         </p:style>
         <p:txBody>
-          <a:bodyPr rtlCol="0" anchor="ctr"/>
+          <a:bodyPr rtlCol="0" anchor="ctr" wrap="square" lIns="182880" tIns="137160"/>
           <a:lstStyle/>
           <a:p>
             <a:pPr algn="ctr">
-              <a:defRPr sz="1300" b="1">
+              <a:defRPr sz="1500" b="1">
                 <a:solidFill>
                   <a:srgbClr val="16162A"/>
                 </a:solidFill>
               </a:defRPr>
             </a:pPr>
             <a:r>
-              <a:t>Duty Rosters (/api/rosters)  ➔  GET /, POST /, PATCH /:id, DELETE /:id</a:t>
-            </a:r>
-          </a:p>
-        </p:txBody>
-      </p:sp>
-      <p:sp>
-        <p:nvSpPr>
-          <p:cNvPr id="7" name="Rounded Rectangle 6"/>
+              <a:t>Model: Roster</a:t>
+            </a:r>
+          </a:p>
+          <a:p>
+            <a:pPr>
+              <a:spcBef>
+                <a:spcPts val="600"/>
+              </a:spcBef>
+              <a:defRPr sz="1100">
+                <a:solidFill>
+                  <a:srgbClr val="707080"/>
+                </a:solidFill>
+              </a:defRPr>
+            </a:pPr>
+            <a:r>
+              <a:t>Fields: id, nurseId, shiftId, departmentId, date, status, notes</a:t>
+            </a:r>
+          </a:p>
+        </p:txBody>
+      </p:sp>
+      <p:sp>
+        <p:nvSpPr>
+          <p:cNvPr id="8" name="Rounded Rectangle 7"/>
           <p:cNvSpPr/>
           <p:nvPr/>
         </p:nvSpPr>
         <p:spPr>
           <a:xfrm>
-            <a:off x="731520" y="3977639"/>
-            <a:ext cx="10607040" cy="685800"/>
+            <a:off x="731520" y="4480560"/>
+            <a:ext cx="5120640" cy="1371600"/>
           </a:xfrm>
           <a:prstGeom prst="roundRect">
             <a:avLst/>
           </a:prstGeom>
           <a:solidFill>
-            <a:srgbClr val="EDE9FE"/>
+            <a:srgbClr val="FFFFFF"/>
           </a:solidFill>
-          <a:ln>
+          <a:ln w="25400">
             <a:solidFill>
-              <a:srgbClr val="5142C5"/>
+              <a:srgbClr val="059669"/>
             </a:solidFill>
           </a:ln>
         </p:spPr>
@@ -5653,42 +7864,57 @@
           </a:fontRef>
         </p:style>
         <p:txBody>
-          <a:bodyPr rtlCol="0" anchor="ctr"/>
+          <a:bodyPr rtlCol="0" anchor="ctr" wrap="square" lIns="182880" tIns="137160"/>
           <a:lstStyle/>
           <a:p>
             <a:pPr algn="ctr">
-              <a:defRPr sz="1300" b="1">
-                <a:solidFill>
-                  <a:srgbClr val="16162A"/>
-                </a:solidFill>
-              </a:defRPr>
-            </a:pPr>
-            <a:r>
-              <a:t>Leave &amp; Swaps (/api/leave-requests &amp; /api/shift-swaps)  ➔  GET /, POST /, PATCH /:id/approve, PATCH /:id/reject</a:t>
-            </a:r>
-          </a:p>
-        </p:txBody>
-      </p:sp>
-      <p:sp>
-        <p:nvSpPr>
-          <p:cNvPr id="8" name="Rounded Rectangle 7"/>
+              <a:defRPr sz="1500" b="1">
+                <a:solidFill>
+                  <a:srgbClr val="059669"/>
+                </a:solidFill>
+              </a:defRPr>
+            </a:pPr>
+            <a:r>
+              <a:t>Model: CommunicationScenario</a:t>
+            </a:r>
+          </a:p>
+          <a:p>
+            <a:pPr>
+              <a:spcBef>
+                <a:spcPts val="600"/>
+              </a:spcBef>
+              <a:defRPr sz="1100">
+                <a:solidFill>
+                  <a:srgbClr val="707080"/>
+                </a:solidFill>
+              </a:defRPr>
+            </a:pPr>
+            <a:r>
+              <a:t>Fields: id, title, category, description, characterRole, difficulty</a:t>
+            </a:r>
+          </a:p>
+        </p:txBody>
+      </p:sp>
+      <p:sp>
+        <p:nvSpPr>
+          <p:cNvPr id="9" name="Rounded Rectangle 8"/>
           <p:cNvSpPr/>
           <p:nvPr/>
         </p:nvSpPr>
         <p:spPr>
           <a:xfrm>
-            <a:off x="731520" y="4754879"/>
-            <a:ext cx="10607040" cy="685800"/>
+            <a:off x="6217920" y="1463040"/>
+            <a:ext cx="5120640" cy="1371600"/>
           </a:xfrm>
           <a:prstGeom prst="roundRect">
             <a:avLst/>
           </a:prstGeom>
           <a:solidFill>
-            <a:srgbClr val="EDE9FE"/>
+            <a:srgbClr val="FFFFFF"/>
           </a:solidFill>
-          <a:ln>
+          <a:ln w="25400">
             <a:solidFill>
-              <a:srgbClr val="5142C5"/>
+              <a:srgbClr val="F59E0B"/>
             </a:solidFill>
           </a:ln>
         </p:spPr>
@@ -5707,40 +7933,55 @@
           </a:fontRef>
         </p:style>
         <p:txBody>
-          <a:bodyPr rtlCol="0" anchor="ctr"/>
+          <a:bodyPr rtlCol="0" anchor="ctr" wrap="square" lIns="182880" tIns="137160"/>
           <a:lstStyle/>
           <a:p>
             <a:pPr algn="ctr">
-              <a:defRPr sz="1300" b="1">
-                <a:solidFill>
-                  <a:srgbClr val="16162A"/>
-                </a:solidFill>
-              </a:defRPr>
-            </a:pPr>
-            <a:r>
-              <a:t>AI Patient Simulator (/api/communication-simulator)  ➔  GET /scenarios, POST /sessions, POST /messages, POST /end</a:t>
-            </a:r>
-          </a:p>
-        </p:txBody>
-      </p:sp>
-      <p:sp>
-        <p:nvSpPr>
-          <p:cNvPr id="9" name="Rounded Rectangle 8"/>
+              <a:defRPr sz="1500" b="1">
+                <a:solidFill>
+                  <a:srgbClr val="F59E0B"/>
+                </a:solidFill>
+              </a:defRPr>
+            </a:pPr>
+            <a:r>
+              <a:t>Model: CommunicationSession</a:t>
+            </a:r>
+          </a:p>
+          <a:p>
+            <a:pPr>
+              <a:spcBef>
+                <a:spcPts val="600"/>
+              </a:spcBef>
+              <a:defRPr sz="1100">
+                <a:solidFill>
+                  <a:srgbClr val="707080"/>
+                </a:solidFill>
+              </a:defRPr>
+            </a:pPr>
+            <a:r>
+              <a:t>Fields: id, userId, scenarioId, status, overallScore</a:t>
+            </a:r>
+          </a:p>
+        </p:txBody>
+      </p:sp>
+      <p:sp>
+        <p:nvSpPr>
+          <p:cNvPr id="10" name="Rounded Rectangle 9"/>
           <p:cNvSpPr/>
           <p:nvPr/>
         </p:nvSpPr>
         <p:spPr>
           <a:xfrm>
-            <a:off x="731520" y="5532119"/>
-            <a:ext cx="10607040" cy="685800"/>
+            <a:off x="6217920" y="2971800"/>
+            <a:ext cx="5120640" cy="1371600"/>
           </a:xfrm>
           <a:prstGeom prst="roundRect">
             <a:avLst/>
           </a:prstGeom>
           <a:solidFill>
-            <a:srgbClr val="EDE9FE"/>
+            <a:srgbClr val="FFFFFF"/>
           </a:solidFill>
-          <a:ln>
+          <a:ln w="25400">
             <a:solidFill>
               <a:srgbClr val="5142C5"/>
             </a:solidFill>
@@ -5761,18 +8002,102 @@
           </a:fontRef>
         </p:style>
         <p:txBody>
-          <a:bodyPr rtlCol="0" anchor="ctr"/>
+          <a:bodyPr rtlCol="0" anchor="ctr" wrap="square" lIns="182880" tIns="137160"/>
           <a:lstStyle/>
           <a:p>
             <a:pPr algn="ctr">
-              <a:defRPr sz="1300" b="1">
-                <a:solidFill>
-                  <a:srgbClr val="16162A"/>
-                </a:solidFill>
-              </a:defRPr>
-            </a:pPr>
-            <a:r>
-              <a:t>AI Break Games (/api/games)  ➔  POST /tic-tac-toe/move, POST /tic-tac-toe/score, GET /score</a:t>
+              <a:defRPr sz="1500" b="1">
+                <a:solidFill>
+                  <a:srgbClr val="5142C5"/>
+                </a:solidFill>
+              </a:defRPr>
+            </a:pPr>
+            <a:r>
+              <a:t>Model: CommunicationAnalysis</a:t>
+            </a:r>
+          </a:p>
+          <a:p>
+            <a:pPr>
+              <a:spcBef>
+                <a:spcPts val="600"/>
+              </a:spcBef>
+              <a:defRPr sz="1100">
+                <a:solidFill>
+                  <a:srgbClr val="707080"/>
+                </a:solidFill>
+              </a:defRPr>
+            </a:pPr>
+            <a:r>
+              <a:t>Fields: id, sessionId, overallScore, empathyScore, strengths, feedback</a:t>
+            </a:r>
+          </a:p>
+        </p:txBody>
+      </p:sp>
+      <p:sp>
+        <p:nvSpPr>
+          <p:cNvPr id="11" name="Rounded Rectangle 10"/>
+          <p:cNvSpPr/>
+          <p:nvPr/>
+        </p:nvSpPr>
+        <p:spPr>
+          <a:xfrm>
+            <a:off x="6217920" y="4480560"/>
+            <a:ext cx="5120640" cy="1371600"/>
+          </a:xfrm>
+          <a:prstGeom prst="roundRect">
+            <a:avLst/>
+          </a:prstGeom>
+          <a:solidFill>
+            <a:srgbClr val="FFFFFF"/>
+          </a:solidFill>
+          <a:ln w="25400">
+            <a:solidFill>
+              <a:srgbClr val="059669"/>
+            </a:solidFill>
+          </a:ln>
+        </p:spPr>
+        <p:style>
+          <a:lnRef idx="1">
+            <a:schemeClr val="accent1"/>
+          </a:lnRef>
+          <a:fillRef idx="3">
+            <a:schemeClr val="accent1"/>
+          </a:fillRef>
+          <a:effectRef idx="2">
+            <a:schemeClr val="accent1"/>
+          </a:effectRef>
+          <a:fontRef idx="minor">
+            <a:schemeClr val="lt1"/>
+          </a:fontRef>
+        </p:style>
+        <p:txBody>
+          <a:bodyPr rtlCol="0" anchor="ctr" wrap="square" lIns="182880" tIns="137160"/>
+          <a:lstStyle/>
+          <a:p>
+            <a:pPr algn="ctr">
+              <a:defRPr sz="1500" b="1">
+                <a:solidFill>
+                  <a:srgbClr val="059669"/>
+                </a:solidFill>
+              </a:defRPr>
+            </a:pPr>
+            <a:r>
+              <a:t>Model: NurseGameScore</a:t>
+            </a:r>
+          </a:p>
+          <a:p>
+            <a:pPr>
+              <a:spcBef>
+                <a:spcPts val="600"/>
+              </a:spcBef>
+              <a:defRPr sz="1100">
+                <a:solidFill>
+                  <a:srgbClr val="707080"/>
+                </a:solidFill>
+              </a:defRPr>
+            </a:pPr>
+            <a:r>
+              <a:t>Fields: id, userId, gameType, nurseWins, aiWins, draws, pointsEarned</a:t>
             </a:r>
           </a:p>
         </p:txBody>
